--- a/docs/content/joins/joins_activity.pptx
+++ b/docs/content/joins/joins_activity.pptx
@@ -27,6 +27,7 @@
     <p:sldId id="275" r:id="rId21"/>
     <p:sldId id="276" r:id="rId22"/>
     <p:sldId id="277" r:id="rId23"/>
+    <p:sldId id="278" r:id="rId24"/>
   </p:sldIdLst>
   <p:sldSz cx="9144000" cy="5143500" type="screen16x9"/>
   <p:notesSz cx="6858000" cy="9144000"/>
@@ -3300,7 +3301,7 @@
             </a:pPr>
             <a:r>
               <a:rPr/>
-              <a:t>Worksheet 17 — Joins: Combining Two Bigfoot Tables</a:t>
+              <a:t>Worksheet — Joins: Combining Two Fisher Monitoring Tables</a:t>
             </a:r>
           </a:p>
         </p:txBody>
@@ -3330,7 +3331,7 @@
             </a:pPr>
             <a:r>
               <a:rPr/>
-              <a:t>Keys, mutating joins, and filtering joins to build a map-ready dataset</a:t>
+              <a:t>Keys, mutating joins, and filtering joins on a fisher reintroduction dataset</a:t>
             </a:r>
             <a:br/>
             <a:br/>
@@ -3452,7 +3453,7 @@
                 </a:solidFill>
                 <a:latin typeface="Courier"/>
               </a:rPr>
-              <a:t>bigfoot_df &lt;- reports_df </a:t>
+              <a:t>captures_joined &lt;- captures_df </a:t>
             </a:r>
             <a:r>
               <a:rPr>
@@ -3489,7 +3490,7 @@
                 </a:solidFill>
                 <a:latin typeface="Courier"/>
               </a:rPr>
-              <a:t>(locations_df, </a:t>
+              <a:t>(individuals_df, </a:t>
             </a:r>
             <a:r>
               <a:rPr>
@@ -3534,7 +3535,7 @@
                 </a:solidFill>
                 <a:latin typeface="Courier"/>
               </a:rPr>
-              <a:t>"REPORT_NUMBER"</a:t>
+              <a:t>"animal_id"</a:t>
             </a:r>
             <a:r>
               <a:rPr>
@@ -3552,7 +3553,7 @@
                 </a:solidFill>
                 <a:latin typeface="Courier"/>
               </a:rPr>
-              <a:t>"number"</a:t>
+              <a:t>"fisher_id"</a:t>
             </a:r>
             <a:r>
               <a:rPr>
@@ -3572,7 +3573,7 @@
                 </a:solidFill>
                 <a:latin typeface="Courier"/>
               </a:rPr>
-              <a:t>bigfoot_df </a:t>
+              <a:t>captures_joined </a:t>
             </a:r>
             <a:r>
               <a:rPr>
@@ -3609,7 +3610,7 @@
                 </a:solidFill>
                 <a:latin typeface="Courier"/>
               </a:rPr>
-              <a:t>(REPORT_NUMBER, STATE, REPORT_CLASS, latitude, longitude) </a:t>
+              <a:t>(capture_event, animal_id, capture_date, sex, age_class) </a:t>
             </a:r>
             <a:r>
               <a:rPr>
@@ -3673,7 +3674,17 @@
             </a:r>
             <a:r>
               <a:rPr/>
-              <a:t> for latitude/longitude? What does that mean about those reports?</a:t>
+              <a:t> for </a:t>
+            </a:r>
+            <a:r>
+              <a:rPr>
+                <a:latin typeface="Courier"/>
+              </a:rPr>
+              <a:t>sex</a:t>
+            </a:r>
+            <a:r>
+              <a:rPr/>
+              <a:t>? What does that mean about that capture event?</a:t>
             </a:r>
           </a:p>
           <a:p>
@@ -3902,7 +3913,7 @@
                 </a:solidFill>
                 <a:latin typeface="Courier"/>
               </a:rPr>
-              <a:t>inner &lt;- </a:t>
+              <a:t>key &lt;- </a:t>
             </a:r>
             <a:r>
               <a:rPr>
@@ -3911,42 +3922,6 @@
                 </a:solidFill>
                 <a:latin typeface="Courier"/>
               </a:rPr>
-              <a:t>inner_join</a:t>
-            </a:r>
-            <a:r>
-              <a:rPr>
-                <a:solidFill>
-                  <a:srgbClr val="003B4F"/>
-                </a:solidFill>
-                <a:latin typeface="Courier"/>
-              </a:rPr>
-              <a:t>(reports_df, locations_df, </a:t>
-            </a:r>
-            <a:r>
-              <a:rPr>
-                <a:solidFill>
-                  <a:srgbClr val="657422"/>
-                </a:solidFill>
-                <a:latin typeface="Courier"/>
-              </a:rPr>
-              <a:t>by =</a:t>
-            </a:r>
-            <a:r>
-              <a:rPr>
-                <a:solidFill>
-                  <a:srgbClr val="003B4F"/>
-                </a:solidFill>
-                <a:latin typeface="Courier"/>
-              </a:rPr>
-              <a:t> </a:t>
-            </a:r>
-            <a:r>
-              <a:rPr>
-                <a:solidFill>
-                  <a:srgbClr val="4758AB"/>
-                </a:solidFill>
-                <a:latin typeface="Courier"/>
-              </a:rPr>
               <a:t>c</a:t>
             </a:r>
             <a:r>
@@ -3965,7 +3940,7 @@
                 </a:solidFill>
                 <a:latin typeface="Courier"/>
               </a:rPr>
-              <a:t>"REPORT_NUMBER"</a:t>
+              <a:t>"animal_id"</a:t>
             </a:r>
             <a:r>
               <a:rPr>
@@ -3983,222 +3958,161 @@
                 </a:solidFill>
                 <a:latin typeface="Courier"/>
               </a:rPr>
-              <a:t>"number"</a:t>
-            </a:r>
-            <a:r>
-              <a:rPr>
-                <a:solidFill>
-                  <a:srgbClr val="003B4F"/>
-                </a:solidFill>
-                <a:latin typeface="Courier"/>
-              </a:rPr>
-              <a:t>))</a:t>
-            </a:r>
-            <a:br/>
-            <a:r>
-              <a:rPr>
-                <a:solidFill>
-                  <a:srgbClr val="003B4F"/>
-                </a:solidFill>
-                <a:latin typeface="Courier"/>
-              </a:rPr>
-              <a:t>left  &lt;- </a:t>
-            </a:r>
-            <a:r>
-              <a:rPr>
-                <a:solidFill>
-                  <a:srgbClr val="4758AB"/>
-                </a:solidFill>
-                <a:latin typeface="Courier"/>
-              </a:rPr>
-              <a:t>left_join</a:t>
-            </a:r>
-            <a:r>
-              <a:rPr>
-                <a:solidFill>
-                  <a:srgbClr val="003B4F"/>
-                </a:solidFill>
-                <a:latin typeface="Courier"/>
-              </a:rPr>
-              <a:t> (reports_df, locations_df, </a:t>
-            </a:r>
-            <a:r>
-              <a:rPr>
-                <a:solidFill>
-                  <a:srgbClr val="657422"/>
-                </a:solidFill>
-                <a:latin typeface="Courier"/>
-              </a:rPr>
-              <a:t>by =</a:t>
-            </a:r>
-            <a:r>
-              <a:rPr>
-                <a:solidFill>
-                  <a:srgbClr val="003B4F"/>
-                </a:solidFill>
-                <a:latin typeface="Courier"/>
-              </a:rPr>
-              <a:t> </a:t>
-            </a:r>
-            <a:r>
-              <a:rPr>
-                <a:solidFill>
-                  <a:srgbClr val="4758AB"/>
-                </a:solidFill>
-                <a:latin typeface="Courier"/>
-              </a:rPr>
-              <a:t>c</a:t>
-            </a:r>
-            <a:r>
-              <a:rPr>
-                <a:solidFill>
-                  <a:srgbClr val="003B4F"/>
-                </a:solidFill>
-                <a:latin typeface="Courier"/>
-              </a:rPr>
-              <a:t>(</a:t>
-            </a:r>
-            <a:r>
-              <a:rPr>
-                <a:solidFill>
-                  <a:srgbClr val="20794D"/>
-                </a:solidFill>
-                <a:latin typeface="Courier"/>
-              </a:rPr>
-              <a:t>"REPORT_NUMBER"</a:t>
-            </a:r>
-            <a:r>
-              <a:rPr>
-                <a:solidFill>
-                  <a:srgbClr val="003B4F"/>
-                </a:solidFill>
-                <a:latin typeface="Courier"/>
-              </a:rPr>
-              <a:t> = </a:t>
-            </a:r>
-            <a:r>
-              <a:rPr>
-                <a:solidFill>
-                  <a:srgbClr val="20794D"/>
-                </a:solidFill>
-                <a:latin typeface="Courier"/>
-              </a:rPr>
-              <a:t>"number"</a:t>
-            </a:r>
-            <a:r>
-              <a:rPr>
-                <a:solidFill>
-                  <a:srgbClr val="003B4F"/>
-                </a:solidFill>
-                <a:latin typeface="Courier"/>
-              </a:rPr>
-              <a:t>))</a:t>
-            </a:r>
-            <a:br/>
-            <a:r>
-              <a:rPr>
-                <a:solidFill>
-                  <a:srgbClr val="003B4F"/>
-                </a:solidFill>
-                <a:latin typeface="Courier"/>
-              </a:rPr>
-              <a:t>full  &lt;- </a:t>
-            </a:r>
-            <a:r>
-              <a:rPr>
-                <a:solidFill>
-                  <a:srgbClr val="4758AB"/>
-                </a:solidFill>
-                <a:latin typeface="Courier"/>
-              </a:rPr>
-              <a:t>full_join</a:t>
-            </a:r>
-            <a:r>
-              <a:rPr>
-                <a:solidFill>
-                  <a:srgbClr val="003B4F"/>
-                </a:solidFill>
-                <a:latin typeface="Courier"/>
-              </a:rPr>
-              <a:t> (reports_df, locations_df, </a:t>
-            </a:r>
-            <a:r>
-              <a:rPr>
-                <a:solidFill>
-                  <a:srgbClr val="657422"/>
-                </a:solidFill>
-                <a:latin typeface="Courier"/>
-              </a:rPr>
-              <a:t>by =</a:t>
-            </a:r>
-            <a:r>
-              <a:rPr>
-                <a:solidFill>
-                  <a:srgbClr val="003B4F"/>
-                </a:solidFill>
-                <a:latin typeface="Courier"/>
-              </a:rPr>
-              <a:t> </a:t>
-            </a:r>
-            <a:r>
-              <a:rPr>
-                <a:solidFill>
-                  <a:srgbClr val="4758AB"/>
-                </a:solidFill>
-                <a:latin typeface="Courier"/>
-              </a:rPr>
-              <a:t>c</a:t>
-            </a:r>
-            <a:r>
-              <a:rPr>
-                <a:solidFill>
-                  <a:srgbClr val="003B4F"/>
-                </a:solidFill>
-                <a:latin typeface="Courier"/>
-              </a:rPr>
-              <a:t>(</a:t>
-            </a:r>
-            <a:r>
-              <a:rPr>
-                <a:solidFill>
-                  <a:srgbClr val="20794D"/>
-                </a:solidFill>
-                <a:latin typeface="Courier"/>
-              </a:rPr>
-              <a:t>"REPORT_NUMBER"</a:t>
-            </a:r>
-            <a:r>
-              <a:rPr>
-                <a:solidFill>
-                  <a:srgbClr val="003B4F"/>
-                </a:solidFill>
-                <a:latin typeface="Courier"/>
-              </a:rPr>
-              <a:t> = </a:t>
-            </a:r>
-            <a:r>
-              <a:rPr>
-                <a:solidFill>
-                  <a:srgbClr val="20794D"/>
-                </a:solidFill>
-                <a:latin typeface="Courier"/>
-              </a:rPr>
-              <a:t>"number"</a:t>
-            </a:r>
-            <a:r>
-              <a:rPr>
-                <a:solidFill>
-                  <a:srgbClr val="003B4F"/>
-                </a:solidFill>
-                <a:latin typeface="Courier"/>
-              </a:rPr>
-              <a:t>))</a:t>
+              <a:t>"fisher_id"</a:t>
+            </a:r>
+            <a:r>
+              <a:rPr>
+                <a:solidFill>
+                  <a:srgbClr val="003B4F"/>
+                </a:solidFill>
+                <a:latin typeface="Courier"/>
+              </a:rPr>
+              <a:t>)</a:t>
             </a:r>
             <a:br/>
             <a:br/>
             <a:r>
               <a:rPr>
                 <a:solidFill>
+                  <a:srgbClr val="003B4F"/>
+                </a:solidFill>
+                <a:latin typeface="Courier"/>
+              </a:rPr>
+              <a:t>inner &lt;- </a:t>
+            </a:r>
+            <a:r>
+              <a:rPr>
+                <a:solidFill>
+                  <a:srgbClr val="4758AB"/>
+                </a:solidFill>
+                <a:latin typeface="Courier"/>
+              </a:rPr>
+              <a:t>inner_join</a:t>
+            </a:r>
+            <a:r>
+              <a:rPr>
+                <a:solidFill>
+                  <a:srgbClr val="003B4F"/>
+                </a:solidFill>
+                <a:latin typeface="Courier"/>
+              </a:rPr>
+              <a:t>(captures_df, individuals_df, </a:t>
+            </a:r>
+            <a:r>
+              <a:rPr>
+                <a:solidFill>
+                  <a:srgbClr val="657422"/>
+                </a:solidFill>
+                <a:latin typeface="Courier"/>
+              </a:rPr>
+              <a:t>by =</a:t>
+            </a:r>
+            <a:r>
+              <a:rPr>
+                <a:solidFill>
+                  <a:srgbClr val="003B4F"/>
+                </a:solidFill>
+                <a:latin typeface="Courier"/>
+              </a:rPr>
+              <a:t> key)</a:t>
+            </a:r>
+            <a:br/>
+            <a:r>
+              <a:rPr>
+                <a:solidFill>
+                  <a:srgbClr val="003B4F"/>
+                </a:solidFill>
+                <a:latin typeface="Courier"/>
+              </a:rPr>
+              <a:t>left  &lt;- </a:t>
+            </a:r>
+            <a:r>
+              <a:rPr>
+                <a:solidFill>
+                  <a:srgbClr val="4758AB"/>
+                </a:solidFill>
+                <a:latin typeface="Courier"/>
+              </a:rPr>
+              <a:t>left_join</a:t>
+            </a:r>
+            <a:r>
+              <a:rPr>
+                <a:solidFill>
+                  <a:srgbClr val="003B4F"/>
+                </a:solidFill>
+                <a:latin typeface="Courier"/>
+              </a:rPr>
+              <a:t> (captures_df, individuals_df, </a:t>
+            </a:r>
+            <a:r>
+              <a:rPr>
+                <a:solidFill>
+                  <a:srgbClr val="657422"/>
+                </a:solidFill>
+                <a:latin typeface="Courier"/>
+              </a:rPr>
+              <a:t>by =</a:t>
+            </a:r>
+            <a:r>
+              <a:rPr>
+                <a:solidFill>
+                  <a:srgbClr val="003B4F"/>
+                </a:solidFill>
+                <a:latin typeface="Courier"/>
+              </a:rPr>
+              <a:t> key)</a:t>
+            </a:r>
+            <a:br/>
+            <a:r>
+              <a:rPr>
+                <a:solidFill>
+                  <a:srgbClr val="003B4F"/>
+                </a:solidFill>
+                <a:latin typeface="Courier"/>
+              </a:rPr>
+              <a:t>full  &lt;- </a:t>
+            </a:r>
+            <a:r>
+              <a:rPr>
+                <a:solidFill>
+                  <a:srgbClr val="4758AB"/>
+                </a:solidFill>
+                <a:latin typeface="Courier"/>
+              </a:rPr>
+              <a:t>full_join</a:t>
+            </a:r>
+            <a:r>
+              <a:rPr>
+                <a:solidFill>
+                  <a:srgbClr val="003B4F"/>
+                </a:solidFill>
+                <a:latin typeface="Courier"/>
+              </a:rPr>
+              <a:t> (captures_df, individuals_df, </a:t>
+            </a:r>
+            <a:r>
+              <a:rPr>
+                <a:solidFill>
+                  <a:srgbClr val="657422"/>
+                </a:solidFill>
+                <a:latin typeface="Courier"/>
+              </a:rPr>
+              <a:t>by =</a:t>
+            </a:r>
+            <a:r>
+              <a:rPr>
+                <a:solidFill>
+                  <a:srgbClr val="003B4F"/>
+                </a:solidFill>
+                <a:latin typeface="Courier"/>
+              </a:rPr>
+              <a:t> key)</a:t>
+            </a:r>
+            <a:br/>
+            <a:br/>
+            <a:r>
+              <a:rPr>
+                <a:solidFill>
                   <a:srgbClr val="4758AB"/>
                 </a:solidFill>
                 <a:latin typeface="Courier"/>
@@ -4345,7 +4259,8 @@
                 <a:latin typeface="Courier"/>
               </a:rPr>
               <a:t>inner rows =        left rows =        full rows =
-Was your ranking right?  Y / N</a:t>
+Was your ranking right?  Y / N
+Why does full have MORE rows than left? (which fishers does it add back?)</a:t>
             </a:r>
           </a:p>
         </p:txBody>
@@ -4444,7 +4359,8 @@
               <a:t>inner_join keeps:
 left_join keeps:
 full_join keeps:
-Which reports does inner_join DROP that left_join keeps?</a:t>
+Which capture events does inner_join DROP that left_join keeps?
+Which fishers does full_join ADD that neither inner nor left includes?</a:t>
             </a:r>
           </a:p>
         </p:txBody>
@@ -4529,15 +4445,15 @@
             </a:r>
             <a:r>
               <a:rPr/>
-              <a:t> You want to make a </a:t>
+              <a:t> You want a table of </a:t>
             </a:r>
             <a:r>
               <a:rPr b="1"/>
-              <a:t>map of all sightings</a:t>
-            </a:r>
-            <a:r>
-              <a:rPr/>
-              <a:t>, keeping every report even if some can’t be placed. Which join do you use, and why?</a:t>
+              <a:t>every capture event</a:t>
+            </a:r>
+            <a:r>
+              <a:rPr/>
+              <a:t> for a survival analysis, keeping the event even if the animal was unmarked. Which join do you use, and why?</a:t>
             </a:r>
           </a:p>
           <a:p>
@@ -4566,7 +4482,7 @@
             </a:r>
             <a:r>
               <a:rPr sz="2000"/>
-              <a:t> figure out which rows you can’t afford to drop first — a report with no coordinates is still a report, so mapping calls for </a:t>
+              <a:t> decide which rows you can’t afford to drop first — an unmarked-animal capture is still a capture, so an event-level analysis calls for </a:t>
             </a:r>
             <a:r>
               <a:rPr sz="2000">
@@ -4576,7 +4492,7 @@
             </a:r>
             <a:r>
               <a:rPr sz="2000"/>
-              <a:t>, not </a:t>
+              <a:t> (captures on the left), not </a:t>
             </a:r>
             <a:r>
               <a:rPr sz="2000">
@@ -4649,7 +4565,7 @@
             </a:pPr>
             <a:r>
               <a:rPr sz="2000"/>
-              <a:t>Parts 10–12: anti/semi joins and the map-ready table.</a:t>
+              <a:t>Parts 10–12: anti/semi joins and the analysis-ready table.</a:t>
             </a:r>
           </a:p>
         </p:txBody>
@@ -4740,11 +4656,27 @@
             </a:r>
             <a:r>
               <a:rPr sz="2000" b="1"/>
-              <a:t>Predict first:</a:t>
+              <a:t>Predict first (two ways):</a:t>
             </a:r>
             <a:r>
               <a:rPr sz="2000"/>
-              <a:t> How many reports have NO coordinates? (Total reports minus the number with a latitude from Part 4.)</a:t>
+              <a:t> (a) how many </a:t>
+            </a:r>
+            <a:r>
+              <a:rPr sz="2000" b="1"/>
+              <a:t>capture events</a:t>
+            </a:r>
+            <a:r>
+              <a:rPr sz="2000"/>
+              <a:t> have no matching individual? (b) how many </a:t>
+            </a:r>
+            <a:r>
+              <a:rPr sz="2000" b="1"/>
+              <a:t>released fishers</a:t>
+            </a:r>
+            <a:r>
+              <a:rPr sz="2000"/>
+              <a:t> were never recaptured?</a:t>
             </a:r>
           </a:p>
           <a:p>
@@ -4763,19 +4695,29 @@
             <a:r>
               <a:rPr>
                 <a:solidFill>
-                  <a:srgbClr val="003B4F"/>
-                </a:solidFill>
-                <a:latin typeface="Courier"/>
-              </a:rPr>
-              <a:t>missing_coords &lt;- reports_df </a:t>
-            </a:r>
-            <a:r>
-              <a:rPr>
-                <a:solidFill>
                   <a:srgbClr val="5E5E5E"/>
                 </a:solidFill>
                 <a:latin typeface="Courier"/>
               </a:rPr>
+              <a:t># (a) capture events of unmarked animals</a:t>
+            </a:r>
+            <a:br/>
+            <a:r>
+              <a:rPr>
+                <a:solidFill>
+                  <a:srgbClr val="003B4F"/>
+                </a:solidFill>
+                <a:latin typeface="Courier"/>
+              </a:rPr>
+              <a:t>unmarked &lt;- captures_df </a:t>
+            </a:r>
+            <a:r>
+              <a:rPr>
+                <a:solidFill>
+                  <a:srgbClr val="5E5E5E"/>
+                </a:solidFill>
+                <a:latin typeface="Courier"/>
+              </a:rPr>
               <a:t>%&gt;%</a:t>
             </a:r>
             <a:br/>
@@ -4804,7 +4746,7 @@
                 </a:solidFill>
                 <a:latin typeface="Courier"/>
               </a:rPr>
-              <a:t>(locations_df, </a:t>
+              <a:t>(individuals_df, </a:t>
             </a:r>
             <a:r>
               <a:rPr>
@@ -4849,7 +4791,7 @@
                 </a:solidFill>
                 <a:latin typeface="Courier"/>
               </a:rPr>
-              <a:t>"REPORT_NUMBER"</a:t>
+              <a:t>"animal_id"</a:t>
             </a:r>
             <a:r>
               <a:rPr>
@@ -4867,7 +4809,7 @@
                 </a:solidFill>
                 <a:latin typeface="Courier"/>
               </a:rPr>
-              <a:t>"number"</a:t>
+              <a:t>"fisher_id"</a:t>
             </a:r>
             <a:r>
               <a:rPr>
@@ -4877,26 +4819,155 @@
                 <a:latin typeface="Courier"/>
               </a:rPr>
               <a:t>))</a:t>
+            </a:r>
+            <a:br/>
+            <a:r>
+              <a:rPr>
+                <a:solidFill>
+                  <a:srgbClr val="4758AB"/>
+                </a:solidFill>
+                <a:latin typeface="Courier"/>
+              </a:rPr>
+              <a:t>nrow</a:t>
+            </a:r>
+            <a:r>
+              <a:rPr>
+                <a:solidFill>
+                  <a:srgbClr val="003B4F"/>
+                </a:solidFill>
+                <a:latin typeface="Courier"/>
+              </a:rPr>
+              <a:t>(unmarked)</a:t>
             </a:r>
             <a:br/>
             <a:br/>
             <a:r>
               <a:rPr>
                 <a:solidFill>
+                  <a:srgbClr val="5E5E5E"/>
+                </a:solidFill>
+                <a:latin typeface="Courier"/>
+              </a:rPr>
+              <a:t># (b) released fishers with no capture record — anti_join the OTHER direction</a:t>
+            </a:r>
+            <a:br/>
+            <a:r>
+              <a:rPr>
+                <a:solidFill>
+                  <a:srgbClr val="003B4F"/>
+                </a:solidFill>
+                <a:latin typeface="Courier"/>
+              </a:rPr>
+              <a:t>never_seen &lt;- individuals_df </a:t>
+            </a:r>
+            <a:r>
+              <a:rPr>
+                <a:solidFill>
+                  <a:srgbClr val="5E5E5E"/>
+                </a:solidFill>
+                <a:latin typeface="Courier"/>
+              </a:rPr>
+              <a:t>%&gt;%</a:t>
+            </a:r>
+            <a:br/>
+            <a:r>
+              <a:rPr>
+                <a:solidFill>
+                  <a:srgbClr val="003B4F"/>
+                </a:solidFill>
+                <a:latin typeface="Courier"/>
+              </a:rPr>
+              <a:t>  </a:t>
+            </a:r>
+            <a:r>
+              <a:rPr>
+                <a:solidFill>
                   <a:srgbClr val="4758AB"/>
                 </a:solidFill>
                 <a:latin typeface="Courier"/>
               </a:rPr>
-              <a:t>nrow</a:t>
-            </a:r>
-            <a:r>
-              <a:rPr>
-                <a:solidFill>
-                  <a:srgbClr val="003B4F"/>
-                </a:solidFill>
-                <a:latin typeface="Courier"/>
-              </a:rPr>
-              <a:t>(missing_coords)</a:t>
+              <a:t>anti_join</a:t>
+            </a:r>
+            <a:r>
+              <a:rPr>
+                <a:solidFill>
+                  <a:srgbClr val="003B4F"/>
+                </a:solidFill>
+                <a:latin typeface="Courier"/>
+              </a:rPr>
+              <a:t>(captures_df, </a:t>
+            </a:r>
+            <a:r>
+              <a:rPr>
+                <a:solidFill>
+                  <a:srgbClr val="657422"/>
+                </a:solidFill>
+                <a:latin typeface="Courier"/>
+              </a:rPr>
+              <a:t>by =</a:t>
+            </a:r>
+            <a:r>
+              <a:rPr>
+                <a:solidFill>
+                  <a:srgbClr val="003B4F"/>
+                </a:solidFill>
+                <a:latin typeface="Courier"/>
+              </a:rPr>
+              <a:t> </a:t>
+            </a:r>
+            <a:r>
+              <a:rPr>
+                <a:solidFill>
+                  <a:srgbClr val="4758AB"/>
+                </a:solidFill>
+                <a:latin typeface="Courier"/>
+              </a:rPr>
+              <a:t>c</a:t>
+            </a:r>
+            <a:r>
+              <a:rPr>
+                <a:solidFill>
+                  <a:srgbClr val="003B4F"/>
+                </a:solidFill>
+                <a:latin typeface="Courier"/>
+              </a:rPr>
+              <a:t>(</a:t>
+            </a:r>
+            <a:r>
+              <a:rPr>
+                <a:solidFill>
+                  <a:srgbClr val="20794D"/>
+                </a:solidFill>
+                <a:latin typeface="Courier"/>
+              </a:rPr>
+              <a:t>"fisher_id"</a:t>
+            </a:r>
+            <a:r>
+              <a:rPr>
+                <a:solidFill>
+                  <a:srgbClr val="003B4F"/>
+                </a:solidFill>
+                <a:latin typeface="Courier"/>
+              </a:rPr>
+              <a:t> = </a:t>
+            </a:r>
+            <a:r>
+              <a:rPr>
+                <a:solidFill>
+                  <a:srgbClr val="20794D"/>
+                </a:solidFill>
+                <a:latin typeface="Courier"/>
+              </a:rPr>
+              <a:t>"animal_id"</a:t>
+            </a:r>
+            <a:r>
+              <a:rPr>
+                <a:solidFill>
+                  <a:srgbClr val="003B4F"/>
+                </a:solidFill>
+                <a:latin typeface="Courier"/>
+              </a:rPr>
+              <a:t>))</a:t>
             </a:r>
             <a:br/>
             <a:r>
@@ -4906,7 +4977,7 @@
                 </a:solidFill>
                 <a:latin typeface="Courier"/>
               </a:rPr>
-              <a:t>missing_coords </a:t>
+              <a:t>never_seen </a:t>
             </a:r>
             <a:r>
               <a:rPr>
@@ -4933,106 +5004,16 @@
                 </a:solidFill>
                 <a:latin typeface="Courier"/>
               </a:rPr>
-              <a:t>count</a:t>
-            </a:r>
-            <a:r>
-              <a:rPr>
-                <a:solidFill>
-                  <a:srgbClr val="003B4F"/>
-                </a:solidFill>
-                <a:latin typeface="Courier"/>
-              </a:rPr>
-              <a:t>(STATE, </a:t>
-            </a:r>
-            <a:r>
-              <a:rPr>
-                <a:solidFill>
-                  <a:srgbClr val="657422"/>
-                </a:solidFill>
-                <a:latin typeface="Courier"/>
-              </a:rPr>
-              <a:t>sort =</a:t>
-            </a:r>
-            <a:r>
-              <a:rPr>
-                <a:solidFill>
-                  <a:srgbClr val="003B4F"/>
-                </a:solidFill>
-                <a:latin typeface="Courier"/>
-              </a:rPr>
-              <a:t> </a:t>
-            </a:r>
-            <a:r>
-              <a:rPr>
-                <a:solidFill>
-                  <a:srgbClr val="8F5902"/>
-                </a:solidFill>
-                <a:latin typeface="Courier"/>
-              </a:rPr>
-              <a:t>TRUE</a:t>
-            </a:r>
-            <a:r>
-              <a:rPr>
-                <a:solidFill>
-                  <a:srgbClr val="003B4F"/>
-                </a:solidFill>
-                <a:latin typeface="Courier"/>
-              </a:rPr>
-              <a:t>) </a:t>
-            </a:r>
-            <a:r>
-              <a:rPr>
-                <a:solidFill>
-                  <a:srgbClr val="5E5E5E"/>
-                </a:solidFill>
-                <a:latin typeface="Courier"/>
-              </a:rPr>
-              <a:t>%&gt;%</a:t>
-            </a:r>
-            <a:r>
-              <a:rPr>
-                <a:solidFill>
-                  <a:srgbClr val="003B4F"/>
-                </a:solidFill>
-                <a:latin typeface="Courier"/>
-              </a:rPr>
-              <a:t> </a:t>
-            </a:r>
-            <a:r>
-              <a:rPr>
-                <a:solidFill>
-                  <a:srgbClr val="4758AB"/>
-                </a:solidFill>
-                <a:latin typeface="Courier"/>
-              </a:rPr>
-              <a:t>head</a:t>
-            </a:r>
-            <a:r>
-              <a:rPr>
-                <a:solidFill>
-                  <a:srgbClr val="003B4F"/>
-                </a:solidFill>
-                <a:latin typeface="Courier"/>
-              </a:rPr>
-              <a:t>(</a:t>
-            </a:r>
-            <a:r>
-              <a:rPr>
-                <a:solidFill>
-                  <a:srgbClr val="AD0000"/>
-                </a:solidFill>
-                <a:latin typeface="Courier"/>
-              </a:rPr>
-              <a:t>4</a:t>
-            </a:r>
-            <a:r>
-              <a:rPr>
-                <a:solidFill>
-                  <a:srgbClr val="003B4F"/>
-                </a:solidFill>
-                <a:latin typeface="Courier"/>
-              </a:rPr>
-              <a:t>)</a:t>
+              <a:t>select</a:t>
+            </a:r>
+            <a:r>
+              <a:rPr>
+                <a:solidFill>
+                  <a:srgbClr val="003B4F"/>
+                </a:solidFill>
+                <a:latin typeface="Courier"/>
+              </a:rPr>
+              <a:t>(fisher_id, sex, site, release_date)</a:t>
             </a:r>
           </a:p>
           <a:p>
@@ -5056,7 +5037,8 @@
               <a:rPr>
                 <a:latin typeface="Courier"/>
               </a:rPr>
-              <a:t>Reports with no coordinates:
+              <a:t>Capture events with no individual:
+Released fishers never recaptured:
 Did anti_join ADD any columns, or just filter rows?</a:t>
             </a:r>
           </a:p>
@@ -5154,19 +5136,29 @@
             <a:r>
               <a:rPr>
                 <a:solidFill>
-                  <a:srgbClr val="003B4F"/>
-                </a:solidFill>
-                <a:latin typeface="Courier"/>
-              </a:rPr>
-              <a:t>mappable_reports &lt;- reports_df </a:t>
-            </a:r>
-            <a:r>
-              <a:rPr>
-                <a:solidFill>
                   <a:srgbClr val="5E5E5E"/>
                 </a:solidFill>
                 <a:latin typeface="Courier"/>
               </a:rPr>
+              <a:t># Released fishers that WERE recaptured at least once</a:t>
+            </a:r>
+            <a:br/>
+            <a:r>
+              <a:rPr>
+                <a:solidFill>
+                  <a:srgbClr val="003B4F"/>
+                </a:solidFill>
+                <a:latin typeface="Courier"/>
+              </a:rPr>
+              <a:t>recaptured &lt;- individuals_df </a:t>
+            </a:r>
+            <a:r>
+              <a:rPr>
+                <a:solidFill>
+                  <a:srgbClr val="5E5E5E"/>
+                </a:solidFill>
+                <a:latin typeface="Courier"/>
+              </a:rPr>
               <a:t>%&gt;%</a:t>
             </a:r>
             <a:br/>
@@ -5195,7 +5187,7 @@
                 </a:solidFill>
                 <a:latin typeface="Courier"/>
               </a:rPr>
-              <a:t>(locations_df, </a:t>
+              <a:t>(captures_df, </a:t>
             </a:r>
             <a:r>
               <a:rPr>
@@ -5240,7 +5232,7 @@
                 </a:solidFill>
                 <a:latin typeface="Courier"/>
               </a:rPr>
-              <a:t>"REPORT_NUMBER"</a:t>
+              <a:t>"fisher_id"</a:t>
             </a:r>
             <a:r>
               <a:rPr>
@@ -5258,7 +5250,7 @@
                 </a:solidFill>
                 <a:latin typeface="Courier"/>
               </a:rPr>
-              <a:t>"number"</a:t>
+              <a:t>"animal_id"</a:t>
             </a:r>
             <a:r>
               <a:rPr>
@@ -5287,7 +5279,7 @@
                 </a:solidFill>
                 <a:latin typeface="Courier"/>
               </a:rPr>
-              <a:t>(mappable_reports)</a:t>
+              <a:t>(recaptured)</a:t>
             </a:r>
           </a:p>
           <a:p>
@@ -5343,7 +5335,8 @@
               <a:rPr>
                 <a:latin typeface="Courier"/>
               </a:rPr>
-              <a:t>Your answer:</a:t>
+              <a:t>Your answer:
+recaptured rows + never_seen rows should equal nrow(individuals_df) — does it?</a:t>
             </a:r>
           </a:p>
         </p:txBody>
@@ -5395,7 +5388,7 @@
             </a:pPr>
             <a:r>
               <a:rPr/>
-              <a:t>Part 12 · Build the map-ready table</a:t>
+              <a:t>Part 12 · Build one analysis-ready table</a:t>
             </a:r>
           </a:p>
         </p:txBody>
@@ -5434,7 +5427,7 @@
                 </a:solidFill>
                 <a:latin typeface="Courier"/>
               </a:rPr>
-              <a:t># Reports + coordinates, ready for next week's map -------</a:t>
+              <a:t># Every KNOWN-individual capture, with the fisher's attributes attached ---</a:t>
             </a:r>
             <a:br/>
             <a:r>
@@ -5444,7 +5437,7 @@
                 </a:solidFill>
                 <a:latin typeface="Courier"/>
               </a:rPr>
-              <a:t>bigfoot_mappable &lt;- reports_df </a:t>
+              <a:t>fisher_analysis &lt;- captures_df </a:t>
             </a:r>
             <a:r>
               <a:rPr>
@@ -5472,16 +5465,16 @@
                 </a:solidFill>
                 <a:latin typeface="Courier"/>
               </a:rPr>
-              <a:t>left_join</a:t>
-            </a:r>
-            <a:r>
-              <a:rPr>
-                <a:solidFill>
-                  <a:srgbClr val="003B4F"/>
-                </a:solidFill>
-                <a:latin typeface="Courier"/>
-              </a:rPr>
-              <a:t>(locations_df, </a:t>
+              <a:t>inner_join</a:t>
+            </a:r>
+            <a:r>
+              <a:rPr>
+                <a:solidFill>
+                  <a:srgbClr val="003B4F"/>
+                </a:solidFill>
+                <a:latin typeface="Courier"/>
+              </a:rPr>
+              <a:t>(individuals_df, </a:t>
             </a:r>
             <a:r>
               <a:rPr>
@@ -5526,7 +5519,7 @@
                 </a:solidFill>
                 <a:latin typeface="Courier"/>
               </a:rPr>
-              <a:t>"REPORT_NUMBER"</a:t>
+              <a:t>"animal_id"</a:t>
             </a:r>
             <a:r>
               <a:rPr>
@@ -5544,7 +5537,7 @@
                 </a:solidFill>
                 <a:latin typeface="Courier"/>
               </a:rPr>
-              <a:t>"number"</a:t>
+              <a:t>"fisher_id"</a:t>
             </a:r>
             <a:r>
               <a:rPr>
@@ -5581,7 +5574,7 @@
                 </a:solidFill>
                 <a:latin typeface="Courier"/>
               </a:rPr>
-              <a:t>filter</a:t>
+              <a:t>mutate</a:t>
             </a:r>
             <a:r>
               <a:rPr>
@@ -5595,11 +5588,75 @@
             <a:r>
               <a:rPr>
                 <a:solidFill>
+                  <a:srgbClr val="657422"/>
+                </a:solidFill>
+                <a:latin typeface="Courier"/>
+              </a:rPr>
+              <a:t>days_since_release =</a:t>
+            </a:r>
+            <a:r>
+              <a:rPr>
+                <a:solidFill>
+                  <a:srgbClr val="003B4F"/>
+                </a:solidFill>
+                <a:latin typeface="Courier"/>
+              </a:rPr>
+              <a:t> </a:t>
+            </a:r>
+            <a:r>
+              <a:rPr>
+                <a:solidFill>
+                  <a:srgbClr val="4758AB"/>
+                </a:solidFill>
+                <a:latin typeface="Courier"/>
+              </a:rPr>
+              <a:t>as.numeric</a:t>
+            </a:r>
+            <a:r>
+              <a:rPr>
+                <a:solidFill>
+                  <a:srgbClr val="003B4F"/>
+                </a:solidFill>
+                <a:latin typeface="Courier"/>
+              </a:rPr>
+              <a:t>(capture_date </a:t>
+            </a:r>
+            <a:r>
+              <a:rPr>
+                <a:solidFill>
                   <a:srgbClr val="5E5E5E"/>
                 </a:solidFill>
                 <a:latin typeface="Courier"/>
               </a:rPr>
-              <a:t>!</a:t>
+              <a:t>-</a:t>
+            </a:r>
+            <a:r>
+              <a:rPr>
+                <a:solidFill>
+                  <a:srgbClr val="003B4F"/>
+                </a:solidFill>
+                <a:latin typeface="Courier"/>
+              </a:rPr>
+              <a:t> release_date)) </a:t>
+            </a:r>
+            <a:r>
+              <a:rPr>
+                <a:solidFill>
+                  <a:srgbClr val="5E5E5E"/>
+                </a:solidFill>
+                <a:latin typeface="Courier"/>
+              </a:rPr>
+              <a:t>%&gt;%</a:t>
+            </a:r>
+            <a:br/>
+            <a:r>
+              <a:rPr>
+                <a:solidFill>
+                  <a:srgbClr val="003B4F"/>
+                </a:solidFill>
+                <a:latin typeface="Courier"/>
+              </a:rPr>
+              <a:t>  </a:t>
             </a:r>
             <a:r>
               <a:rPr>
@@ -5608,43 +5665,62 @@
                 </a:solidFill>
                 <a:latin typeface="Courier"/>
               </a:rPr>
-              <a:t>is.na</a:t>
-            </a:r>
-            <a:r>
-              <a:rPr>
-                <a:solidFill>
-                  <a:srgbClr val="003B4F"/>
-                </a:solidFill>
-                <a:latin typeface="Courier"/>
-              </a:rPr>
-              <a:t>(latitude), </a:t>
-            </a:r>
-            <a:r>
-              <a:rPr>
-                <a:solidFill>
-                  <a:srgbClr val="5E5E5E"/>
-                </a:solidFill>
-                <a:latin typeface="Courier"/>
-              </a:rPr>
-              <a:t>!</a:t>
-            </a:r>
-            <a:r>
-              <a:rPr>
-                <a:solidFill>
-                  <a:srgbClr val="4758AB"/>
-                </a:solidFill>
-                <a:latin typeface="Courier"/>
-              </a:rPr>
-              <a:t>is.na</a:t>
-            </a:r>
-            <a:r>
-              <a:rPr>
-                <a:solidFill>
-                  <a:srgbClr val="003B4F"/>
-                </a:solidFill>
-                <a:latin typeface="Courier"/>
-              </a:rPr>
-              <a:t>(longitude))</a:t>
+              <a:t>select</a:t>
+            </a:r>
+            <a:r>
+              <a:rPr>
+                <a:solidFill>
+                  <a:srgbClr val="003B4F"/>
+                </a:solidFill>
+                <a:latin typeface="Courier"/>
+              </a:rPr>
+              <a:t>(animal_id, sex, age_class, capture_date, days_since_release,</a:t>
+            </a:r>
+            <a:br/>
+            <a:r>
+              <a:rPr>
+                <a:solidFill>
+                  <a:srgbClr val="003B4F"/>
+                </a:solidFill>
+                <a:latin typeface="Courier"/>
+              </a:rPr>
+              <a:t>         </a:t>
+            </a:r>
+            <a:r>
+              <a:rPr>
+                <a:solidFill>
+                  <a:srgbClr val="657422"/>
+                </a:solidFill>
+                <a:latin typeface="Courier"/>
+              </a:rPr>
+              <a:t>capture_site =</a:t>
+            </a:r>
+            <a:r>
+              <a:rPr>
+                <a:solidFill>
+                  <a:srgbClr val="003B4F"/>
+                </a:solidFill>
+                <a:latin typeface="Courier"/>
+              </a:rPr>
+              <a:t> site.x, </a:t>
+            </a:r>
+            <a:r>
+              <a:rPr>
+                <a:solidFill>
+                  <a:srgbClr val="657422"/>
+                </a:solidFill>
+                <a:latin typeface="Courier"/>
+              </a:rPr>
+              <a:t>release_site =</a:t>
+            </a:r>
+            <a:r>
+              <a:rPr>
+                <a:solidFill>
+                  <a:srgbClr val="003B4F"/>
+                </a:solidFill>
+                <a:latin typeface="Courier"/>
+              </a:rPr>
+              <a:t> site.y, mass_kg)</a:t>
             </a:r>
             <a:br/>
             <a:br/>
@@ -5655,7 +5731,7 @@
                 </a:solidFill>
                 <a:latin typeface="Courier"/>
               </a:rPr>
-              <a:t>bigfoot_mappable </a:t>
+              <a:t>fisher_analysis </a:t>
             </a:r>
             <a:r>
               <a:rPr>
@@ -5666,93 +5742,55 @@
               </a:rPr>
               <a:t>%&gt;%</a:t>
             </a:r>
+            <a:r>
+              <a:rPr>
+                <a:solidFill>
+                  <a:srgbClr val="003B4F"/>
+                </a:solidFill>
+                <a:latin typeface="Courier"/>
+              </a:rPr>
+              <a:t> </a:t>
+            </a:r>
+            <a:r>
+              <a:rPr>
+                <a:solidFill>
+                  <a:srgbClr val="4758AB"/>
+                </a:solidFill>
+                <a:latin typeface="Courier"/>
+              </a:rPr>
+              <a:t>head</a:t>
+            </a:r>
+            <a:r>
+              <a:rPr>
+                <a:solidFill>
+                  <a:srgbClr val="003B4F"/>
+                </a:solidFill>
+                <a:latin typeface="Courier"/>
+              </a:rPr>
+              <a:t>()</a:t>
+            </a:r>
+          </a:p>
+          <a:p>
+            <a:pPr lvl="0" indent="0">
+              <a:buNone/>
+            </a:pPr>
+            <a:r>
+              <a:rPr>
+                <a:solidFill>
+                  <a:srgbClr val="5E5E5E"/>
+                </a:solidFill>
+                <a:latin typeface="Courier"/>
+              </a:rPr>
+              <a:t># Save it for later ------------------------------------</a:t>
+            </a:r>
             <a:br/>
             <a:r>
               <a:rPr>
                 <a:solidFill>
-                  <a:srgbClr val="003B4F"/>
-                </a:solidFill>
-                <a:latin typeface="Courier"/>
-              </a:rPr>
-              <a:t>  </a:t>
-            </a:r>
-            <a:r>
-              <a:rPr>
-                <a:solidFill>
                   <a:srgbClr val="4758AB"/>
                 </a:solidFill>
                 <a:latin typeface="Courier"/>
               </a:rPr>
-              <a:t>select</a:t>
-            </a:r>
-            <a:r>
-              <a:rPr>
-                <a:solidFill>
-                  <a:srgbClr val="003B4F"/>
-                </a:solidFill>
-                <a:latin typeface="Courier"/>
-              </a:rPr>
-              <a:t>(REPORT_NUMBER, STATE, SEASON, REPORT_CLASS, latitude, longitude) </a:t>
-            </a:r>
-            <a:r>
-              <a:rPr>
-                <a:solidFill>
-                  <a:srgbClr val="5E5E5E"/>
-                </a:solidFill>
-                <a:latin typeface="Courier"/>
-              </a:rPr>
-              <a:t>%&gt;%</a:t>
-            </a:r>
-            <a:br/>
-            <a:r>
-              <a:rPr>
-                <a:solidFill>
-                  <a:srgbClr val="003B4F"/>
-                </a:solidFill>
-                <a:latin typeface="Courier"/>
-              </a:rPr>
-              <a:t>  </a:t>
-            </a:r>
-            <a:r>
-              <a:rPr>
-                <a:solidFill>
-                  <a:srgbClr val="4758AB"/>
-                </a:solidFill>
-                <a:latin typeface="Courier"/>
-              </a:rPr>
-              <a:t>head</a:t>
-            </a:r>
-            <a:r>
-              <a:rPr>
-                <a:solidFill>
-                  <a:srgbClr val="003B4F"/>
-                </a:solidFill>
-                <a:latin typeface="Courier"/>
-              </a:rPr>
-              <a:t>()</a:t>
-            </a:r>
-          </a:p>
-          <a:p>
-            <a:pPr lvl="0" indent="0">
-              <a:buNone/>
-            </a:pPr>
-            <a:r>
-              <a:rPr>
-                <a:solidFill>
-                  <a:srgbClr val="5E5E5E"/>
-                </a:solidFill>
-                <a:latin typeface="Courier"/>
-              </a:rPr>
-              <a:t># Save it for the mapping lecture ------------------------</a:t>
-            </a:r>
-            <a:br/>
-            <a:r>
-              <a:rPr>
-                <a:solidFill>
-                  <a:srgbClr val="4758AB"/>
-                </a:solidFill>
-                <a:latin typeface="Courier"/>
-              </a:rPr>
               <a:t>write_csv</a:t>
             </a:r>
             <a:r>
@@ -5762,7 +5800,7 @@
                 </a:solidFill>
                 <a:latin typeface="Courier"/>
               </a:rPr>
-              <a:t>(bigfoot_mappable, </a:t>
+              <a:t>(fisher_analysis, </a:t>
             </a:r>
             <a:r>
               <a:rPr>
@@ -5771,7 +5809,7 @@
                 </a:solidFill>
                 <a:latin typeface="Courier"/>
               </a:rPr>
-              <a:t>"data/bigfoot_joined.csv"</a:t>
+              <a:t>"data/fisher_joined.csv"</a:t>
             </a:r>
             <a:r>
               <a:rPr>
@@ -5797,13 +5835,33 @@
             </a:r>
             <a:r>
               <a:rPr/>
-              <a:t> How many rows are in your map-ready table? How does this compare to the original </a:t>
-            </a:r>
-            <a:r>
-              <a:rPr>
-                <a:latin typeface="Courier"/>
-              </a:rPr>
-              <a:t>reports_df</a:t>
+              <a:t> How many rows are in your analysis table? Why is it smaller than </a:t>
+            </a:r>
+            <a:r>
+              <a:rPr>
+                <a:latin typeface="Courier"/>
+              </a:rPr>
+              <a:t>captures_df</a:t>
+            </a:r>
+            <a:r>
+              <a:rPr/>
+              <a:t>, and why did we use </a:t>
+            </a:r>
+            <a:r>
+              <a:rPr>
+                <a:latin typeface="Courier"/>
+              </a:rPr>
+              <a:t>inner_join</a:t>
+            </a:r>
+            <a:r>
+              <a:rPr/>
+              <a:t> here instead of </a:t>
+            </a:r>
+            <a:r>
+              <a:rPr>
+                <a:latin typeface="Courier"/>
+              </a:rPr>
+              <a:t>left_join</a:t>
             </a:r>
             <a:r>
               <a:rPr/>
@@ -5818,8 +5876,9 @@
               <a:rPr>
                 <a:latin typeface="Courier"/>
               </a:rPr>
-              <a:t>Map-ready rows:
-Difference from reports_df, and why:</a:t>
+              <a:t>Analysis-table rows:
+Difference from captures_df, and why:
+Why inner_join and not left_join for THIS table:</a:t>
             </a:r>
           </a:p>
         </p:txBody>
@@ -5997,7 +6056,7 @@
               <a:rPr>
                 <a:latin typeface="Courier"/>
               </a:rPr>
-              <a:t>index</a:t>
+              <a:t>site</a:t>
             </a:r>
             <a:r>
               <a:rPr/>
@@ -6082,7 +6141,7 @@
             </a:pPr>
             <a:r>
               <a:rPr/>
-              <a:t>Joins — Two Bigfoot Tables into One 🦶</a:t>
+              <a:t>Joins — Two Fisher Monitoring Tables into One</a:t>
             </a:r>
           </a:p>
         </p:txBody>
@@ -6102,6 +6161,56 @@
           <a:bodyPr/>
           <a:lstStyle/>
           <a:p>
+            <a:pPr lvl="0" indent="0" marL="1270000">
+              <a:buNone/>
+            </a:pPr>
+            <a:r>
+              <a:rPr sz="2000" b="1"/>
+              <a:t>About the data (constructed for teaching)</a:t>
+            </a:r>
+          </a:p>
+          <a:p>
+            <a:pPr lvl="0" indent="0" marL="1270000">
+              <a:buNone/>
+            </a:pPr>
+            <a:r>
+              <a:rPr sz="2000"/>
+              <a:t>Fishers (</a:t>
+            </a:r>
+            <a:r>
+              <a:rPr sz="2000" i="1"/>
+              <a:t>Pekania pennanti</a:t>
+            </a:r>
+            <a:r>
+              <a:rPr sz="2000"/>
+              <a:t>) — a large forest weasel — have been reintroduced to several US states from Canadian source populations. Monitoring produces exactly the shape of data joins are for: one table of the </a:t>
+            </a:r>
+            <a:r>
+              <a:rPr sz="2000" b="1"/>
+              <a:t>animals released</a:t>
+            </a:r>
+            <a:r>
+              <a:rPr sz="2000"/>
+              <a:t>, and a separate table of every </a:t>
+            </a:r>
+            <a:r>
+              <a:rPr sz="2000" b="1"/>
+              <a:t>field capture / collar event</a:t>
+            </a:r>
+            <a:r>
+              <a:rPr sz="2000"/>
+              <a:t>. The two files here are </a:t>
+            </a:r>
+            <a:r>
+              <a:rPr sz="2000" b="1"/>
+              <a:t>simulated</a:t>
+            </a:r>
+            <a:r>
+              <a:rPr sz="2000"/>
+              <a:t> — patterned on real programs (e.g. the Washington Cascades translocations), but the numbers are invented. Use them to learn joins.</a:t>
+            </a:r>
+          </a:p>
+          <a:p>
             <a:pPr lvl="0" indent="0" marL="0">
               <a:spcBef>
                 <a:spcPts val="3000"/>
@@ -6138,17 +6247,71 @@
               <a:rPr b="1">
                 <a:latin typeface="Courier"/>
               </a:rPr>
-              <a:t>bfro_reports.csv</a:t>
-            </a:r>
-            <a:r>
-              <a:rPr/>
-              <a:t> — one row per sighting report (year, season, state, class, the written account), keyed by </a:t>
-            </a:r>
-            <a:r>
-              <a:rPr>
-                <a:latin typeface="Courier"/>
-              </a:rPr>
-              <a:t>REPORT_NUMBER</a:t>
+              <a:t>fisher_individuals.csv</a:t>
+            </a:r>
+            <a:r>
+              <a:rPr/>
+              <a:t> — one row per released fisher: </a:t>
+            </a:r>
+            <a:r>
+              <a:rPr>
+                <a:latin typeface="Courier"/>
+              </a:rPr>
+              <a:t>sex</a:t>
+            </a:r>
+            <a:r>
+              <a:rPr/>
+              <a:t>, </a:t>
+            </a:r>
+            <a:r>
+              <a:rPr>
+                <a:latin typeface="Courier"/>
+              </a:rPr>
+              <a:t>age_class</a:t>
+            </a:r>
+            <a:r>
+              <a:rPr/>
+              <a:t>, </a:t>
+            </a:r>
+            <a:r>
+              <a:rPr>
+                <a:latin typeface="Courier"/>
+              </a:rPr>
+              <a:t>source</a:t>
+            </a:r>
+            <a:r>
+              <a:rPr/>
+              <a:t>, </a:t>
+            </a:r>
+            <a:r>
+              <a:rPr>
+                <a:latin typeface="Courier"/>
+              </a:rPr>
+              <a:t>site</a:t>
+            </a:r>
+            <a:r>
+              <a:rPr/>
+              <a:t> (release site), </a:t>
+            </a:r>
+            <a:r>
+              <a:rPr>
+                <a:latin typeface="Courier"/>
+              </a:rPr>
+              <a:t>release_date</a:t>
+            </a:r>
+            <a:r>
+              <a:rPr/>
+              <a:t>. Keyed by </a:t>
+            </a:r>
+            <a:r>
+              <a:rPr>
+                <a:latin typeface="Courier"/>
+              </a:rPr>
+              <a:t>fisher_id</a:t>
+            </a:r>
+            <a:r>
+              <a:rPr/>
+              <a:t>.</a:t>
             </a:r>
           </a:p>
           <a:p>
@@ -6157,17 +6320,61 @@
               <a:rPr b="1">
                 <a:latin typeface="Courier"/>
               </a:rPr>
-              <a:t>bfro_locations.csv</a:t>
-            </a:r>
-            <a:r>
-              <a:rPr/>
-              <a:t> — the coordinates for reports that were geocoded, keyed by </a:t>
-            </a:r>
-            <a:r>
-              <a:rPr>
-                <a:latin typeface="Courier"/>
-              </a:rPr>
-              <a:t>number</a:t>
+              <a:t>fisher_captures.csv</a:t>
+            </a:r>
+            <a:r>
+              <a:rPr/>
+              <a:t> — one row per field capture event: </a:t>
+            </a:r>
+            <a:r>
+              <a:rPr>
+                <a:latin typeface="Courier"/>
+              </a:rPr>
+              <a:t>capture_date</a:t>
+            </a:r>
+            <a:r>
+              <a:rPr/>
+              <a:t>, </a:t>
+            </a:r>
+            <a:r>
+              <a:rPr>
+                <a:latin typeface="Courier"/>
+              </a:rPr>
+              <a:t>site</a:t>
+            </a:r>
+            <a:r>
+              <a:rPr/>
+              <a:t> (capture site), </a:t>
+            </a:r>
+            <a:r>
+              <a:rPr>
+                <a:latin typeface="Courier"/>
+              </a:rPr>
+              <a:t>mass_kg</a:t>
+            </a:r>
+            <a:r>
+              <a:rPr/>
+              <a:t>, </a:t>
+            </a:r>
+            <a:r>
+              <a:rPr>
+                <a:latin typeface="Courier"/>
+              </a:rPr>
+              <a:t>collar_id</a:t>
+            </a:r>
+            <a:r>
+              <a:rPr/>
+              <a:t>. Keyed by </a:t>
+            </a:r>
+            <a:r>
+              <a:rPr>
+                <a:latin typeface="Courier"/>
+              </a:rPr>
+              <a:t>animal_id</a:t>
+            </a:r>
+            <a:r>
+              <a:rPr/>
+              <a:t>.</a:t>
             </a:r>
           </a:p>
           <a:p>
@@ -6275,7 +6482,7 @@
             </a:r>
             <a:r>
               <a:rPr/>
-              <a:t> to filter, and build the map-ready table</a:t>
+              <a:t> to filter, and build one analysis-ready table</a:t>
             </a:r>
           </a:p>
           <a:p>
@@ -6349,37 +6556,35 @@
             </a:pPr>
             <a:r>
               <a:rPr sz="2000"/>
-              <a:t>Before every join, write down the row count you expect from </a:t>
+              <a:t>Before every join, write down the row count you expect. </a:t>
             </a:r>
             <a:r>
               <a:rPr sz="2000">
                 <a:latin typeface="Courier"/>
               </a:rPr>
-              <a:t>reports_df</a:t>
+              <a:t>fisher_captures.csv</a:t>
             </a:r>
             <a:r>
               <a:rPr sz="2000"/>
-              <a:t> and </a:t>
+              <a:t> has more rows than </a:t>
             </a:r>
             <a:r>
               <a:rPr sz="2000">
                 <a:latin typeface="Courier"/>
               </a:rPr>
-              <a:t>locations_df</a:t>
+              <a:t>fisher_individuals.csv</a:t>
             </a:r>
             <a:r>
               <a:rPr sz="2000"/>
-              <a:t> — then type the join and see if you were right. </a:t>
-            </a:r>
-            <a:r>
-              <a:rPr sz="2000">
-                <a:latin typeface="Courier"/>
-              </a:rPr>
-              <a:t>reports_df</a:t>
+              <a:t> (a fisher can be recaptured many times), and a few capture events are of </a:t>
+            </a:r>
+            <a:r>
+              <a:rPr sz="2000" b="1"/>
+              <a:t>unmarked</a:t>
             </a:r>
             <a:r>
               <a:rPr sz="2000"/>
-              <a:t> has thousands of rows and only some were ever geocoded, so a wrong guess almost always means you misjudged how many reports actually have coordinates, not that R did something strange.</a:t>
+              <a:t> animals with no matching individual — a wrong guess almost always means you misjudged the matching, not that R did something strange.</a:t>
             </a:r>
           </a:p>
         </p:txBody>
@@ -6468,7 +6673,7 @@
             </a:pPr>
             <a:r>
               <a:rPr b="1"/>
-              <a:t>Add the report class to a map count</a:t>
+              <a:t>Capture effort by site and sex</a:t>
             </a:r>
           </a:p>
           <a:p>
@@ -6481,7 +6686,7 @@
             </a:r>
             <a:r>
               <a:rPr/>
-              <a:t> join, then count sightings per state per class.</a:t>
+              <a:t> join, then count capture events per release site per sex.</a:t>
             </a:r>
           </a:p>
           <a:p>
@@ -6495,7 +6700,7 @@
                 </a:solidFill>
                 <a:latin typeface="Courier"/>
               </a:rPr>
-              <a:t>bigfoot_df </a:t>
+              <a:t>captures_df </a:t>
             </a:r>
             <a:r>
               <a:rPr>
@@ -6523,7 +6728,43 @@
                 </a:solidFill>
                 <a:latin typeface="Courier"/>
               </a:rPr>
-              <a:t>filter</a:t>
+              <a:t>inner_join</a:t>
+            </a:r>
+            <a:r>
+              <a:rPr>
+                <a:solidFill>
+                  <a:srgbClr val="003B4F"/>
+                </a:solidFill>
+                <a:latin typeface="Courier"/>
+              </a:rPr>
+              <a:t>(individuals_df, </a:t>
+            </a:r>
+            <a:r>
+              <a:rPr>
+                <a:solidFill>
+                  <a:srgbClr val="657422"/>
+                </a:solidFill>
+                <a:latin typeface="Courier"/>
+              </a:rPr>
+              <a:t>by =</a:t>
+            </a:r>
+            <a:r>
+              <a:rPr>
+                <a:solidFill>
+                  <a:srgbClr val="003B4F"/>
+                </a:solidFill>
+                <a:latin typeface="Courier"/>
+              </a:rPr>
+              <a:t> </a:t>
+            </a:r>
+            <a:r>
+              <a:rPr>
+                <a:solidFill>
+                  <a:srgbClr val="4758AB"/>
+                </a:solidFill>
+                <a:latin typeface="Courier"/>
+              </a:rPr>
+              <a:t>c</a:t>
             </a:r>
             <a:r>
               <a:rPr>
@@ -6537,11 +6778,57 @@
             <a:r>
               <a:rPr>
                 <a:solidFill>
+                  <a:srgbClr val="20794D"/>
+                </a:solidFill>
+                <a:latin typeface="Courier"/>
+              </a:rPr>
+              <a:t>"animal_id"</a:t>
+            </a:r>
+            <a:r>
+              <a:rPr>
+                <a:solidFill>
+                  <a:srgbClr val="003B4F"/>
+                </a:solidFill>
+                <a:latin typeface="Courier"/>
+              </a:rPr>
+              <a:t> = </a:t>
+            </a:r>
+            <a:r>
+              <a:rPr>
+                <a:solidFill>
+                  <a:srgbClr val="20794D"/>
+                </a:solidFill>
+                <a:latin typeface="Courier"/>
+              </a:rPr>
+              <a:t>"fisher_id"</a:t>
+            </a:r>
+            <a:r>
+              <a:rPr>
+                <a:solidFill>
+                  <a:srgbClr val="003B4F"/>
+                </a:solidFill>
+                <a:latin typeface="Courier"/>
+              </a:rPr>
+              <a:t>)) </a:t>
+            </a:r>
+            <a:r>
+              <a:rPr>
+                <a:solidFill>
                   <a:srgbClr val="5E5E5E"/>
                 </a:solidFill>
                 <a:latin typeface="Courier"/>
               </a:rPr>
-              <a:t>!</a:t>
+              <a:t>%&gt;%</a:t>
+            </a:r>
+            <a:br/>
+            <a:r>
+              <a:rPr>
+                <a:solidFill>
+                  <a:srgbClr val="003B4F"/>
+                </a:solidFill>
+                <a:latin typeface="Courier"/>
+              </a:rPr>
+              <a:t>  </a:t>
             </a:r>
             <a:r>
               <a:rPr>
@@ -6550,16 +6837,16 @@
                 </a:solidFill>
                 <a:latin typeface="Courier"/>
               </a:rPr>
-              <a:t>is.na</a:t>
-            </a:r>
-            <a:r>
-              <a:rPr>
-                <a:solidFill>
-                  <a:srgbClr val="003B4F"/>
-                </a:solidFill>
-                <a:latin typeface="Courier"/>
-              </a:rPr>
-              <a:t>(latitude)) </a:t>
+              <a:t>count</a:t>
+            </a:r>
+            <a:r>
+              <a:rPr>
+                <a:solidFill>
+                  <a:srgbClr val="003B4F"/>
+                </a:solidFill>
+                <a:latin typeface="Courier"/>
+              </a:rPr>
+              <a:t>(site.y, sex) </a:t>
             </a:r>
             <a:r>
               <a:rPr>
@@ -6570,6 +6857,24 @@
               </a:rPr>
               <a:t>%&gt;%</a:t>
             </a:r>
+            <a:r>
+              <a:rPr>
+                <a:solidFill>
+                  <a:srgbClr val="003B4F"/>
+                </a:solidFill>
+                <a:latin typeface="Courier"/>
+              </a:rPr>
+              <a:t>        </a:t>
+            </a:r>
+            <a:r>
+              <a:rPr>
+                <a:solidFill>
+                  <a:srgbClr val="5E5E5E"/>
+                </a:solidFill>
+                <a:latin typeface="Courier"/>
+              </a:rPr>
+              <a:t># site.y = release site</a:t>
+            </a:r>
             <a:br/>
             <a:r>
               <a:rPr>
@@ -6587,35 +6892,16 @@
                 </a:solidFill>
                 <a:latin typeface="Courier"/>
               </a:rPr>
-              <a:t>count</a:t>
-            </a:r>
-            <a:r>
-              <a:rPr>
-                <a:solidFill>
-                  <a:srgbClr val="003B4F"/>
-                </a:solidFill>
-                <a:latin typeface="Courier"/>
-              </a:rPr>
-              <a:t>(STATE, REPORT_CLASS) </a:t>
-            </a:r>
-            <a:r>
-              <a:rPr>
-                <a:solidFill>
-                  <a:srgbClr val="5E5E5E"/>
-                </a:solidFill>
-                <a:latin typeface="Courier"/>
-              </a:rPr>
-              <a:t>%&gt;%</a:t>
-            </a:r>
-            <a:br/>
-            <a:r>
-              <a:rPr>
-                <a:solidFill>
-                  <a:srgbClr val="003B4F"/>
-                </a:solidFill>
-                <a:latin typeface="Courier"/>
-              </a:rPr>
-              <a:t>  </a:t>
+              <a:t>arrange</a:t>
+            </a:r>
+            <a:r>
+              <a:rPr>
+                <a:solidFill>
+                  <a:srgbClr val="003B4F"/>
+                </a:solidFill>
+                <a:latin typeface="Courier"/>
+              </a:rPr>
+              <a:t>(</a:t>
             </a:r>
             <a:r>
               <a:rPr>
@@ -6624,24 +6910,6 @@
                 </a:solidFill>
                 <a:latin typeface="Courier"/>
               </a:rPr>
-              <a:t>arrange</a:t>
-            </a:r>
-            <a:r>
-              <a:rPr>
-                <a:solidFill>
-                  <a:srgbClr val="003B4F"/>
-                </a:solidFill>
-                <a:latin typeface="Courier"/>
-              </a:rPr>
-              <a:t>(</a:t>
-            </a:r>
-            <a:r>
-              <a:rPr>
-                <a:solidFill>
-                  <a:srgbClr val="4758AB"/>
-                </a:solidFill>
-                <a:latin typeface="Courier"/>
-              </a:rPr>
               <a:t>desc</a:t>
             </a:r>
             <a:r>
@@ -6651,62 +6919,7 @@
                 </a:solidFill>
                 <a:latin typeface="Courier"/>
               </a:rPr>
-              <a:t>(n)) </a:t>
-            </a:r>
-            <a:r>
-              <a:rPr>
-                <a:solidFill>
-                  <a:srgbClr val="5E5E5E"/>
-                </a:solidFill>
-                <a:latin typeface="Courier"/>
-              </a:rPr>
-              <a:t>%&gt;%</a:t>
-            </a:r>
-            <a:br/>
-            <a:r>
-              <a:rPr>
-                <a:solidFill>
-                  <a:srgbClr val="003B4F"/>
-                </a:solidFill>
-                <a:latin typeface="Courier"/>
-              </a:rPr>
-              <a:t>  </a:t>
-            </a:r>
-            <a:r>
-              <a:rPr>
-                <a:solidFill>
-                  <a:srgbClr val="4758AB"/>
-                </a:solidFill>
-                <a:latin typeface="Courier"/>
-              </a:rPr>
-              <a:t>head</a:t>
-            </a:r>
-            <a:r>
-              <a:rPr>
-                <a:solidFill>
-                  <a:srgbClr val="003B4F"/>
-                </a:solidFill>
-                <a:latin typeface="Courier"/>
-              </a:rPr>
-              <a:t>(</a:t>
-            </a:r>
-            <a:r>
-              <a:rPr>
-                <a:solidFill>
-                  <a:srgbClr val="AD0000"/>
-                </a:solidFill>
-                <a:latin typeface="Courier"/>
-              </a:rPr>
-              <a:t>10</a:t>
-            </a:r>
-            <a:r>
-              <a:rPr>
-                <a:solidFill>
-                  <a:srgbClr val="003B4F"/>
-                </a:solidFill>
-                <a:latin typeface="Courier"/>
-              </a:rPr>
-              <a:t>)</a:t>
+              <a:t>(n))</a:t>
             </a:r>
           </a:p>
           <a:p>
@@ -6723,7 +6936,7 @@
             </a:r>
             <a:r>
               <a:rPr/>
-              <a:t> Which state + class combination has the most reports?</a:t>
+              <a:t> Which release site + sex combination has the most capture events? Does that tell you about the animals, or about where crews spent time?</a:t>
             </a:r>
           </a:p>
           <a:p>
@@ -6746,7 +6959,7 @@
             </a:pPr>
             <a:r>
               <a:rPr b="1"/>
-              <a:t>Locations with no report</a:t>
+              <a:t>Recapture count per fisher</a:t>
             </a:r>
           </a:p>
           <a:p>
@@ -6754,34 +6967,20 @@
               <a:buNone/>
             </a:pPr>
             <a:r>
-              <a:rPr/>
-              <a:t>✏️ </a:t>
-            </a:r>
-            <a:r>
               <a:rPr b="1"/>
-              <a:t>Your turn:</a:t>
-            </a:r>
-            <a:r>
-              <a:rPr/>
-              <a:t> Use an </a:t>
-            </a:r>
-            <a:r>
-              <a:rPr>
-                <a:latin typeface="Courier"/>
-              </a:rPr>
-              <a:t>anti_join</a:t>
-            </a:r>
-            <a:r>
-              <a:rPr/>
-              <a:t> the </a:t>
+              <a:t>▶ Try this:</a:t>
+            </a:r>
+            <a:r>
+              <a:rPr/>
+              <a:t> how many times was each </a:t>
             </a:r>
             <a:r>
               <a:rPr i="1"/>
-              <a:t>other</a:t>
-            </a:r>
-            <a:r>
-              <a:rPr/>
-              <a:t> direction to find locations that have no matching report. How many are there, and what might explain them?</a:t>
+              <a:t>identified</a:t>
+            </a:r>
+            <a:r>
+              <a:rPr/>
+              <a:t> fisher caught?</a:t>
             </a:r>
           </a:p>
           <a:p>
@@ -6791,11 +6990,193 @@
             <a:r>
               <a:rPr>
                 <a:solidFill>
+                  <a:srgbClr val="003B4F"/>
+                </a:solidFill>
+                <a:latin typeface="Courier"/>
+              </a:rPr>
+              <a:t>captures_df </a:t>
+            </a:r>
+            <a:r>
+              <a:rPr>
+                <a:solidFill>
                   <a:srgbClr val="5E5E5E"/>
                 </a:solidFill>
                 <a:latin typeface="Courier"/>
               </a:rPr>
-              <a:t># Write your anti_join here (locations first this time):</a:t>
+              <a:t>%&gt;%</a:t>
+            </a:r>
+            <a:br/>
+            <a:r>
+              <a:rPr>
+                <a:solidFill>
+                  <a:srgbClr val="003B4F"/>
+                </a:solidFill>
+                <a:latin typeface="Courier"/>
+              </a:rPr>
+              <a:t>  </a:t>
+            </a:r>
+            <a:r>
+              <a:rPr>
+                <a:solidFill>
+                  <a:srgbClr val="4758AB"/>
+                </a:solidFill>
+                <a:latin typeface="Courier"/>
+              </a:rPr>
+              <a:t>semi_join</a:t>
+            </a:r>
+            <a:r>
+              <a:rPr>
+                <a:solidFill>
+                  <a:srgbClr val="003B4F"/>
+                </a:solidFill>
+                <a:latin typeface="Courier"/>
+              </a:rPr>
+              <a:t>(individuals_df, </a:t>
+            </a:r>
+            <a:r>
+              <a:rPr>
+                <a:solidFill>
+                  <a:srgbClr val="657422"/>
+                </a:solidFill>
+                <a:latin typeface="Courier"/>
+              </a:rPr>
+              <a:t>by =</a:t>
+            </a:r>
+            <a:r>
+              <a:rPr>
+                <a:solidFill>
+                  <a:srgbClr val="003B4F"/>
+                </a:solidFill>
+                <a:latin typeface="Courier"/>
+              </a:rPr>
+              <a:t> </a:t>
+            </a:r>
+            <a:r>
+              <a:rPr>
+                <a:solidFill>
+                  <a:srgbClr val="4758AB"/>
+                </a:solidFill>
+                <a:latin typeface="Courier"/>
+              </a:rPr>
+              <a:t>c</a:t>
+            </a:r>
+            <a:r>
+              <a:rPr>
+                <a:solidFill>
+                  <a:srgbClr val="003B4F"/>
+                </a:solidFill>
+                <a:latin typeface="Courier"/>
+              </a:rPr>
+              <a:t>(</a:t>
+            </a:r>
+            <a:r>
+              <a:rPr>
+                <a:solidFill>
+                  <a:srgbClr val="20794D"/>
+                </a:solidFill>
+                <a:latin typeface="Courier"/>
+              </a:rPr>
+              <a:t>"animal_id"</a:t>
+            </a:r>
+            <a:r>
+              <a:rPr>
+                <a:solidFill>
+                  <a:srgbClr val="003B4F"/>
+                </a:solidFill>
+                <a:latin typeface="Courier"/>
+              </a:rPr>
+              <a:t> = </a:t>
+            </a:r>
+            <a:r>
+              <a:rPr>
+                <a:solidFill>
+                  <a:srgbClr val="20794D"/>
+                </a:solidFill>
+                <a:latin typeface="Courier"/>
+              </a:rPr>
+              <a:t>"fisher_id"</a:t>
+            </a:r>
+            <a:r>
+              <a:rPr>
+                <a:solidFill>
+                  <a:srgbClr val="003B4F"/>
+                </a:solidFill>
+                <a:latin typeface="Courier"/>
+              </a:rPr>
+              <a:t>)) </a:t>
+            </a:r>
+            <a:r>
+              <a:rPr>
+                <a:solidFill>
+                  <a:srgbClr val="5E5E5E"/>
+                </a:solidFill>
+                <a:latin typeface="Courier"/>
+              </a:rPr>
+              <a:t>%&gt;%</a:t>
+            </a:r>
+            <a:br/>
+            <a:r>
+              <a:rPr>
+                <a:solidFill>
+                  <a:srgbClr val="003B4F"/>
+                </a:solidFill>
+                <a:latin typeface="Courier"/>
+              </a:rPr>
+              <a:t>  </a:t>
+            </a:r>
+            <a:r>
+              <a:rPr>
+                <a:solidFill>
+                  <a:srgbClr val="4758AB"/>
+                </a:solidFill>
+                <a:latin typeface="Courier"/>
+              </a:rPr>
+              <a:t>count</a:t>
+            </a:r>
+            <a:r>
+              <a:rPr>
+                <a:solidFill>
+                  <a:srgbClr val="003B4F"/>
+                </a:solidFill>
+                <a:latin typeface="Courier"/>
+              </a:rPr>
+              <a:t>(animal_id, </a:t>
+            </a:r>
+            <a:r>
+              <a:rPr>
+                <a:solidFill>
+                  <a:srgbClr val="657422"/>
+                </a:solidFill>
+                <a:latin typeface="Courier"/>
+              </a:rPr>
+              <a:t>sort =</a:t>
+            </a:r>
+            <a:r>
+              <a:rPr>
+                <a:solidFill>
+                  <a:srgbClr val="003B4F"/>
+                </a:solidFill>
+                <a:latin typeface="Courier"/>
+              </a:rPr>
+              <a:t> </a:t>
+            </a:r>
+            <a:r>
+              <a:rPr>
+                <a:solidFill>
+                  <a:srgbClr val="8F5902"/>
+                </a:solidFill>
+                <a:latin typeface="Courier"/>
+              </a:rPr>
+              <a:t>TRUE</a:t>
+            </a:r>
+            <a:r>
+              <a:rPr>
+                <a:solidFill>
+                  <a:srgbClr val="003B4F"/>
+                </a:solidFill>
+                <a:latin typeface="Courier"/>
+              </a:rPr>
+              <a:t>)</a:t>
             </a:r>
           </a:p>
           <a:p>
@@ -6806,8 +7187,8 @@
               <a:rPr>
                 <a:latin typeface="Courier"/>
               </a:rPr>
-              <a:t>Locations with no report:
-Possible explanation:</a:t>
+              <a:t>Most-recaptured fisher and its count:
+Number of fishers caught exactly once:</a:t>
             </a:r>
           </a:p>
         </p:txBody>
@@ -6859,7 +7240,7 @@
             </a:pPr>
             <a:r>
               <a:rPr/>
-              <a:t>Getting unstuck</a:t>
+              <a:t>Extension — out of class (~30–40 min)</a:t>
             </a:r>
           </a:p>
         </p:txBody>
@@ -6879,191 +7260,588 @@
           <a:bodyPr/>
           <a:lstStyle/>
           <a:p>
-            <a:pPr lvl="0" indent="-342900" marL="342900">
-              <a:buAutoNum type="arabicPeriod"/>
-            </a:pPr>
-            <a:r>
-              <a:rPr b="1">
-                <a:latin typeface="Courier"/>
-              </a:rPr>
-              <a:t>by</a:t>
-            </a:r>
+            <a:pPr lvl="0" indent="0" marL="0">
+              <a:buNone/>
+            </a:pPr>
+            <a:r>
+              <a:rPr i="1"/>
+              <a:t>Turn this in with your worksheet. In class you joined two tables that were each incomplete on their own. Now you check </a:t>
+            </a:r>
+            <a:r>
+              <a:rPr b="1" i="1"/>
+              <a:t>how complete</a:t>
+            </a:r>
+            <a:r>
+              <a:rPr i="1"/>
+              <a:t> the join really is — and then tell me the </a:t>
+            </a:r>
+            <a:r>
+              <a:rPr b="1" i="1"/>
+              <a:t>one thing that surprised you most</a:t>
+            </a:r>
+            <a:r>
+              <a:rPr i="1"/>
+              <a:t>.</a:t>
+            </a:r>
+          </a:p>
+          <a:p>
+            <a:pPr lvl="0" indent="0" marL="1270000">
+              <a:buNone/>
+            </a:pPr>
+            <a:r>
+              <a:rPr sz="2000" b="1"/>
+              <a:t>Important</a:t>
+            </a:r>
+          </a:p>
+          <a:p>
+            <a:pPr lvl="0" indent="0" marL="1270000">
+              <a:buNone/>
+            </a:pPr>
+            <a:r>
+              <a:rPr sz="2000" b="1"/>
+              <a:t>Only E3 (the “most surprising thing”) is graded.</a:t>
+            </a:r>
+            <a:r>
+              <a:rPr sz="2000"/>
+              <a:t> E1 and E2 are the work that gets you there — do them, but the grade is on the write-up. E3 must be </a:t>
+            </a:r>
+            <a:r>
+              <a:rPr sz="2000" b="1"/>
+              <a:t>handwritten</a:t>
+            </a:r>
+            <a:r>
+              <a:rPr sz="2000"/>
+              <a:t>, photographed, and embedded (</a:t>
+            </a:r>
+            <a:r>
+              <a:rPr sz="2000">
+                <a:latin typeface="Courier"/>
+              </a:rPr>
+              <a:t>![caption](my_photo.jpg)</a:t>
+            </a:r>
+            <a:r>
+              <a:rPr sz="2000"/>
+              <a:t>).</a:t>
+            </a:r>
+          </a:p>
+          <a:p>
+            <a:pPr lvl="0" indent="0" marL="0">
+              <a:spcBef>
+                <a:spcPts val="3000"/>
+              </a:spcBef>
+              <a:buNone/>
+            </a:pPr>
             <a:r>
               <a:rPr b="1"/>
-              <a:t> must be supplied / weird match</a:t>
-            </a:r>
-            <a:r>
-              <a:rPr/>
-              <a:t> → the key columns are named differently; use </a:t>
-            </a:r>
-            <a:r>
-              <a:rPr>
-                <a:latin typeface="Courier"/>
-              </a:rPr>
-              <a:t>by = c("REPORT_NUMBER" = "number")</a:t>
-            </a:r>
-            <a:r>
-              <a:rPr/>
-              <a:t>.</a:t>
-            </a:r>
-          </a:p>
-          <a:p>
-            <a:pPr lvl="0" indent="-342900" marL="342900">
-              <a:buAutoNum type="arabicPeriod"/>
+              <a:t>E1 · How complete is the join? (not graded — do it anyway)</a:t>
+            </a:r>
+          </a:p>
+          <a:p>
+            <a:pPr lvl="0" indent="0">
+              <a:buNone/>
+            </a:pPr>
+            <a:r>
+              <a:rPr>
+                <a:solidFill>
+                  <a:srgbClr val="5E5E5E"/>
+                </a:solidFill>
+                <a:latin typeface="Courier"/>
+              </a:rPr>
+              <a:t># Capture events with NO matching individual (unmarked animals)</a:t>
+            </a:r>
+            <a:br/>
+            <a:r>
+              <a:rPr>
+                <a:solidFill>
+                  <a:srgbClr val="003B4F"/>
+                </a:solidFill>
+                <a:latin typeface="Courier"/>
+              </a:rPr>
+              <a:t>no_id &lt;- </a:t>
+            </a:r>
+            <a:r>
+              <a:rPr>
+                <a:solidFill>
+                  <a:srgbClr val="4758AB"/>
+                </a:solidFill>
+                <a:latin typeface="Courier"/>
+              </a:rPr>
+              <a:t>anti_join</a:t>
+            </a:r>
+            <a:r>
+              <a:rPr>
+                <a:solidFill>
+                  <a:srgbClr val="003B4F"/>
+                </a:solidFill>
+                <a:latin typeface="Courier"/>
+              </a:rPr>
+              <a:t>(captures_df, individuals_df,</a:t>
+            </a:r>
+            <a:br/>
+            <a:r>
+              <a:rPr>
+                <a:solidFill>
+                  <a:srgbClr val="003B4F"/>
+                </a:solidFill>
+                <a:latin typeface="Courier"/>
+              </a:rPr>
+              <a:t>                   </a:t>
+            </a:r>
+            <a:r>
+              <a:rPr>
+                <a:solidFill>
+                  <a:srgbClr val="657422"/>
+                </a:solidFill>
+                <a:latin typeface="Courier"/>
+              </a:rPr>
+              <a:t>by =</a:t>
+            </a:r>
+            <a:r>
+              <a:rPr>
+                <a:solidFill>
+                  <a:srgbClr val="003B4F"/>
+                </a:solidFill>
+                <a:latin typeface="Courier"/>
+              </a:rPr>
+              <a:t> </a:t>
+            </a:r>
+            <a:r>
+              <a:rPr>
+                <a:solidFill>
+                  <a:srgbClr val="4758AB"/>
+                </a:solidFill>
+                <a:latin typeface="Courier"/>
+              </a:rPr>
+              <a:t>c</a:t>
+            </a:r>
+            <a:r>
+              <a:rPr>
+                <a:solidFill>
+                  <a:srgbClr val="003B4F"/>
+                </a:solidFill>
+                <a:latin typeface="Courier"/>
+              </a:rPr>
+              <a:t>(</a:t>
+            </a:r>
+            <a:r>
+              <a:rPr>
+                <a:solidFill>
+                  <a:srgbClr val="20794D"/>
+                </a:solidFill>
+                <a:latin typeface="Courier"/>
+              </a:rPr>
+              <a:t>"animal_id"</a:t>
+            </a:r>
+            <a:r>
+              <a:rPr>
+                <a:solidFill>
+                  <a:srgbClr val="003B4F"/>
+                </a:solidFill>
+                <a:latin typeface="Courier"/>
+              </a:rPr>
+              <a:t> = </a:t>
+            </a:r>
+            <a:r>
+              <a:rPr>
+                <a:solidFill>
+                  <a:srgbClr val="20794D"/>
+                </a:solidFill>
+                <a:latin typeface="Courier"/>
+              </a:rPr>
+              <a:t>"fisher_id"</a:t>
+            </a:r>
+            <a:r>
+              <a:rPr>
+                <a:solidFill>
+                  <a:srgbClr val="003B4F"/>
+                </a:solidFill>
+                <a:latin typeface="Courier"/>
+              </a:rPr>
+              <a:t>))</a:t>
+            </a:r>
+            <a:br/>
+            <a:r>
+              <a:rPr>
+                <a:solidFill>
+                  <a:srgbClr val="AD0000"/>
+                </a:solidFill>
+                <a:latin typeface="Courier"/>
+              </a:rPr>
+              <a:t>100</a:t>
+            </a:r>
+            <a:r>
+              <a:rPr>
+                <a:solidFill>
+                  <a:srgbClr val="003B4F"/>
+                </a:solidFill>
+                <a:latin typeface="Courier"/>
+              </a:rPr>
+              <a:t> </a:t>
+            </a:r>
+            <a:r>
+              <a:rPr>
+                <a:solidFill>
+                  <a:srgbClr val="5E5E5E"/>
+                </a:solidFill>
+                <a:latin typeface="Courier"/>
+              </a:rPr>
+              <a:t>*</a:t>
+            </a:r>
+            <a:r>
+              <a:rPr>
+                <a:solidFill>
+                  <a:srgbClr val="003B4F"/>
+                </a:solidFill>
+                <a:latin typeface="Courier"/>
+              </a:rPr>
+              <a:t> (</a:t>
+            </a:r>
+            <a:r>
+              <a:rPr>
+                <a:solidFill>
+                  <a:srgbClr val="AD0000"/>
+                </a:solidFill>
+                <a:latin typeface="Courier"/>
+              </a:rPr>
+              <a:t>1</a:t>
+            </a:r>
+            <a:r>
+              <a:rPr>
+                <a:solidFill>
+                  <a:srgbClr val="003B4F"/>
+                </a:solidFill>
+                <a:latin typeface="Courier"/>
+              </a:rPr>
+              <a:t> </a:t>
+            </a:r>
+            <a:r>
+              <a:rPr>
+                <a:solidFill>
+                  <a:srgbClr val="5E5E5E"/>
+                </a:solidFill>
+                <a:latin typeface="Courier"/>
+              </a:rPr>
+              <a:t>-</a:t>
+            </a:r>
+            <a:r>
+              <a:rPr>
+                <a:solidFill>
+                  <a:srgbClr val="003B4F"/>
+                </a:solidFill>
+                <a:latin typeface="Courier"/>
+              </a:rPr>
+              <a:t> </a:t>
+            </a:r>
+            <a:r>
+              <a:rPr>
+                <a:solidFill>
+                  <a:srgbClr val="4758AB"/>
+                </a:solidFill>
+                <a:latin typeface="Courier"/>
+              </a:rPr>
+              <a:t>nrow</a:t>
+            </a:r>
+            <a:r>
+              <a:rPr>
+                <a:solidFill>
+                  <a:srgbClr val="003B4F"/>
+                </a:solidFill>
+                <a:latin typeface="Courier"/>
+              </a:rPr>
+              <a:t>(no_id) </a:t>
+            </a:r>
+            <a:r>
+              <a:rPr>
+                <a:solidFill>
+                  <a:srgbClr val="5E5E5E"/>
+                </a:solidFill>
+                <a:latin typeface="Courier"/>
+              </a:rPr>
+              <a:t>/</a:t>
+            </a:r>
+            <a:r>
+              <a:rPr>
+                <a:solidFill>
+                  <a:srgbClr val="003B4F"/>
+                </a:solidFill>
+                <a:latin typeface="Courier"/>
+              </a:rPr>
+              <a:t> </a:t>
+            </a:r>
+            <a:r>
+              <a:rPr>
+                <a:solidFill>
+                  <a:srgbClr val="4758AB"/>
+                </a:solidFill>
+                <a:latin typeface="Courier"/>
+              </a:rPr>
+              <a:t>nrow</a:t>
+            </a:r>
+            <a:r>
+              <a:rPr>
+                <a:solidFill>
+                  <a:srgbClr val="003B4F"/>
+                </a:solidFill>
+                <a:latin typeface="Courier"/>
+              </a:rPr>
+              <a:t>(captures_df))   </a:t>
+            </a:r>
+            <a:r>
+              <a:rPr>
+                <a:solidFill>
+                  <a:srgbClr val="5E5E5E"/>
+                </a:solidFill>
+                <a:latin typeface="Courier"/>
+              </a:rPr>
+              <a:t># % of events we can attribute</a:t>
+            </a:r>
+            <a:br/>
+            <a:br/>
+            <a:r>
+              <a:rPr>
+                <a:solidFill>
+                  <a:srgbClr val="5E5E5E"/>
+                </a:solidFill>
+                <a:latin typeface="Courier"/>
+              </a:rPr>
+              <a:t># Released fishers never recaptured</a:t>
+            </a:r>
+            <a:br/>
+            <a:r>
+              <a:rPr>
+                <a:solidFill>
+                  <a:srgbClr val="4758AB"/>
+                </a:solidFill>
+                <a:latin typeface="Courier"/>
+              </a:rPr>
+              <a:t>anti_join</a:t>
+            </a:r>
+            <a:r>
+              <a:rPr>
+                <a:solidFill>
+                  <a:srgbClr val="003B4F"/>
+                </a:solidFill>
+                <a:latin typeface="Courier"/>
+              </a:rPr>
+              <a:t>(individuals_df, captures_df, </a:t>
+            </a:r>
+            <a:r>
+              <a:rPr>
+                <a:solidFill>
+                  <a:srgbClr val="657422"/>
+                </a:solidFill>
+                <a:latin typeface="Courier"/>
+              </a:rPr>
+              <a:t>by =</a:t>
+            </a:r>
+            <a:r>
+              <a:rPr>
+                <a:solidFill>
+                  <a:srgbClr val="003B4F"/>
+                </a:solidFill>
+                <a:latin typeface="Courier"/>
+              </a:rPr>
+              <a:t> </a:t>
+            </a:r>
+            <a:r>
+              <a:rPr>
+                <a:solidFill>
+                  <a:srgbClr val="4758AB"/>
+                </a:solidFill>
+                <a:latin typeface="Courier"/>
+              </a:rPr>
+              <a:t>c</a:t>
+            </a:r>
+            <a:r>
+              <a:rPr>
+                <a:solidFill>
+                  <a:srgbClr val="003B4F"/>
+                </a:solidFill>
+                <a:latin typeface="Courier"/>
+              </a:rPr>
+              <a:t>(</a:t>
+            </a:r>
+            <a:r>
+              <a:rPr>
+                <a:solidFill>
+                  <a:srgbClr val="20794D"/>
+                </a:solidFill>
+                <a:latin typeface="Courier"/>
+              </a:rPr>
+              <a:t>"fisher_id"</a:t>
+            </a:r>
+            <a:r>
+              <a:rPr>
+                <a:solidFill>
+                  <a:srgbClr val="003B4F"/>
+                </a:solidFill>
+                <a:latin typeface="Courier"/>
+              </a:rPr>
+              <a:t> = </a:t>
+            </a:r>
+            <a:r>
+              <a:rPr>
+                <a:solidFill>
+                  <a:srgbClr val="20794D"/>
+                </a:solidFill>
+                <a:latin typeface="Courier"/>
+              </a:rPr>
+              <a:t>"animal_id"</a:t>
+            </a:r>
+            <a:r>
+              <a:rPr>
+                <a:solidFill>
+                  <a:srgbClr val="003B4F"/>
+                </a:solidFill>
+                <a:latin typeface="Courier"/>
+              </a:rPr>
+              <a:t>))</a:t>
+            </a:r>
+            <a:br/>
+            <a:br/>
+            <a:r>
+              <a:rPr>
+                <a:solidFill>
+                  <a:srgbClr val="5E5E5E"/>
+                </a:solidFill>
+                <a:latin typeface="Courier"/>
+              </a:rPr>
+              <a:t># The wrong join: no `by =` at all</a:t>
+            </a:r>
+            <a:br/>
+            <a:r>
+              <a:rPr>
+                <a:solidFill>
+                  <a:srgbClr val="4758AB"/>
+                </a:solidFill>
+                <a:latin typeface="Courier"/>
+              </a:rPr>
+              <a:t>left_join</a:t>
+            </a:r>
+            <a:r>
+              <a:rPr>
+                <a:solidFill>
+                  <a:srgbClr val="003B4F"/>
+                </a:solidFill>
+                <a:latin typeface="Courier"/>
+              </a:rPr>
+              <a:t>(captures_df, individuals_df)        </a:t>
+            </a:r>
+            <a:r>
+              <a:rPr>
+                <a:solidFill>
+                  <a:srgbClr val="5E5E5E"/>
+                </a:solidFill>
+                <a:latin typeface="Courier"/>
+              </a:rPr>
+              <a:t># what does dplyr say it joined on?</a:t>
+            </a:r>
+          </a:p>
+          <a:p>
+            <a:pPr lvl="0" indent="0" marL="0">
+              <a:buNone/>
+            </a:pPr>
+            <a:r>
+              <a:rPr/>
+              <a:t>Note the attributable percentage, how many fishers were never seen again, and what column dplyr picks when you leave </a:t>
+            </a:r>
+            <a:r>
+              <a:rPr>
+                <a:latin typeface="Courier"/>
+              </a:rPr>
+              <a:t>by =</a:t>
+            </a:r>
+            <a:r>
+              <a:rPr/>
+              <a:t> out (and why that answer is wrong).</a:t>
+            </a:r>
+          </a:p>
+          <a:p>
+            <a:pPr lvl="0" indent="0" marL="0">
+              <a:spcBef>
+                <a:spcPts val="3000"/>
+              </a:spcBef>
+              <a:buNone/>
             </a:pPr>
             <a:r>
               <a:rPr b="1"/>
-              <a:t>Zero matches</a:t>
-            </a:r>
-            <a:r>
-              <a:rPr/>
-              <a:t> → check the key </a:t>
+              <a:t>E2 · One more join, your choice (not graded — do it anyway)</a:t>
+            </a:r>
+          </a:p>
+          <a:p>
+            <a:pPr lvl="0" indent="0" marL="0">
+              <a:buNone/>
+            </a:pPr>
+            <a:r>
+              <a:rPr/>
+              <a:t>Either: summarize the joined table a new way (mean </a:t>
+            </a:r>
+            <a:r>
+              <a:rPr>
+                <a:latin typeface="Courier"/>
+              </a:rPr>
+              <a:t>mass_kg</a:t>
+            </a:r>
+            <a:r>
+              <a:rPr/>
+              <a:t> by sex; capture count by month), </a:t>
             </a:r>
             <a:r>
               <a:rPr b="1"/>
-              <a:t>type</a:t>
-            </a:r>
-            <a:r>
-              <a:rPr/>
-              <a:t> (</a:t>
-            </a:r>
-            <a:r>
-              <a:rPr>
-                <a:latin typeface="Courier"/>
-              </a:rPr>
-              <a:t>as.integer()</a:t>
-            </a:r>
-            <a:r>
-              <a:rPr/>
-              <a:t> on </a:t>
-            </a:r>
-            <a:r>
-              <a:rPr>
-                <a:latin typeface="Courier"/>
-              </a:rPr>
-              <a:t>REPORT_NUMBER</a:t>
-            </a:r>
-            <a:r>
-              <a:rPr/>
-              <a:t>) — text won’t match a number.</a:t>
-            </a:r>
-          </a:p>
-          <a:p>
-            <a:pPr lvl="0" indent="-342900" marL="342900">
-              <a:buAutoNum type="arabicPeriod"/>
+              <a:t>or</a:t>
+            </a:r>
+            <a:r>
+              <a:rPr/>
+              <a:t> bring in a small table of your own (even 3–4 rows you type with </a:t>
+            </a:r>
+            <a:r>
+              <a:rPr>
+                <a:latin typeface="Courier"/>
+              </a:rPr>
+              <a:t>tibble()</a:t>
+            </a:r>
+            <a:r>
+              <a:rPr/>
+              <a:t> — e.g. a home-range size per </a:t>
+            </a:r>
+            <a:r>
+              <a:rPr>
+                <a:latin typeface="Courier"/>
+              </a:rPr>
+              <a:t>fisher_id</a:t>
+            </a:r>
+            <a:r>
+              <a:rPr/>
+              <a:t>) and join it on the key. Keep it small.</a:t>
+            </a:r>
+          </a:p>
+          <a:p>
+            <a:pPr lvl="0" indent="0" marL="0">
+              <a:spcBef>
+                <a:spcPts val="3000"/>
+              </a:spcBef>
+              <a:buNone/>
             </a:pPr>
             <a:r>
               <a:rPr b="1"/>
-              <a:t>Way too many rows after a join</a:t>
-            </a:r>
-            <a:r>
-              <a:rPr/>
-              <a:t> → a duplicated key fans out the rows; </a:t>
-            </a:r>
-            <a:r>
-              <a:rPr>
-                <a:latin typeface="Courier"/>
-              </a:rPr>
-              <a:t>distinct()</a:t>
-            </a:r>
-            <a:r>
-              <a:rPr/>
-              <a:t> the lookup key first.</a:t>
-            </a:r>
-          </a:p>
-          <a:p>
-            <a:pPr lvl="0" indent="-342900" marL="342900">
-              <a:buAutoNum type="arabicPeriod"/>
-            </a:pPr>
+              <a:t>E3 · The most surprising thing — ✍️ by hand (graded)</a:t>
+            </a:r>
+          </a:p>
+          <a:p>
+            <a:pPr lvl="0" indent="0" marL="0">
+              <a:buNone/>
+            </a:pPr>
+            <a:r>
+              <a:rPr/>
+              <a:t>In a short paragraph, hand-written: across everything you did in this worksheet and E1–E2, </a:t>
+            </a:r>
             <a:r>
               <a:rPr b="1"/>
-              <a:t>dplyr announced </a:t>
-            </a:r>
-            <a:r>
-              <a:rPr b="1">
-                <a:latin typeface="Courier"/>
-              </a:rPr>
-              <a:t>by = join_by(index)</a:t>
-            </a:r>
-            <a:r>
-              <a:rPr/>
-              <a:t> → you forgot to name your key; both tables share an </a:t>
-            </a:r>
-            <a:r>
-              <a:rPr>
-                <a:latin typeface="Courier"/>
-              </a:rPr>
-              <a:t>index</a:t>
-            </a:r>
-            <a:r>
-              <a:rPr/>
-              <a:t> column.</a:t>
-            </a:r>
-          </a:p>
-          <a:p>
-            <a:pPr lvl="0" indent="-342900" marL="342900">
-              <a:buAutoNum type="arabicPeriod"/>
-            </a:pPr>
-            <a:r>
-              <a:rPr b="1"/>
-              <a:t>Cheat sheet</a:t>
-            </a:r>
-            <a:r>
-              <a:rPr/>
-              <a:t> — </a:t>
-            </a:r>
-            <a:r>
-              <a:rPr>
-                <a:hlinkClick r:id="rId2"/>
-              </a:rPr>
-              <a:t>https://dplyr.tidyverse.org/reference/mutate-joins.html</a:t>
-            </a:r>
-          </a:p>
-          <a:p>
-            <a:pPr lvl="0" indent="0" marL="1270000">
-              <a:buNone/>
-            </a:pPr>
-            <a:r>
-              <a:rPr sz="2000"/>
-              <a:t>💡 </a:t>
-            </a:r>
-            <a:r>
-              <a:rPr sz="2000" b="1"/>
-              <a:t>Key idea:</a:t>
-            </a:r>
-            <a:r>
-              <a:rPr sz="2000"/>
-              <a:t> </a:t>
-            </a:r>
-            <a:r>
-              <a:rPr sz="2000">
-                <a:latin typeface="Courier"/>
-              </a:rPr>
-              <a:t>bfro_reports.csv</a:t>
-            </a:r>
-            <a:r>
-              <a:rPr sz="2000"/>
-              <a:t> and </a:t>
-            </a:r>
-            <a:r>
-              <a:rPr sz="2000">
-                <a:latin typeface="Courier"/>
-              </a:rPr>
-              <a:t>bfro_locations.csv</a:t>
-            </a:r>
-            <a:r>
-              <a:rPr sz="2000"/>
-              <a:t> were each incomplete on their own — one had no coordinates, the other had no context. </a:t>
-            </a:r>
-            <a:r>
-              <a:rPr sz="2000">
-                <a:latin typeface="Courier"/>
-              </a:rPr>
-              <a:t>bigfoot_joined.csv</a:t>
-            </a:r>
-            <a:r>
-              <a:rPr sz="2000"/>
-              <a:t> is what you get once a shared key ties them together, and it’s what you’ll load for the mapping worksheet.</a:t>
+              <a:t>what surprised you most about joining these two tables?</a:t>
+            </a:r>
+            <a:r>
+              <a:rPr/>
+              <a:t> Be specific — name the numbers or the rows that surprised you, and say why you expected something different. “Nothing surprised me” is not an answer; if the joins went smoothly, the surprise might be how many capture events could not be tied to a known animal, or how many released fishers were never seen again.</a:t>
             </a:r>
           </a:p>
         </p:txBody>
@@ -7074,6 +7852,282 @@
 </file>
 
 <file path=ppt/slides/slide22.xml><?xml version="1.0" encoding="utf-8"?>
+<p:sld xmlns:a="http://schemas.openxmlformats.org/drawingml/2006/main" xmlns:r="http://schemas.openxmlformats.org/officeDocument/2006/relationships" xmlns:p="http://schemas.openxmlformats.org/presentationml/2006/main">
+  <p:cSld>
+    <p:spTree>
+      <p:nvGrpSpPr>
+        <p:cNvPr id="1" name=""/>
+        <p:cNvGrpSpPr/>
+        <p:nvPr/>
+      </p:nvGrpSpPr>
+      <p:grpSpPr>
+        <a:xfrm>
+          <a:off x="0" y="0"/>
+          <a:ext cx="0" cy="0"/>
+          <a:chOff x="0" y="0"/>
+          <a:chExt cx="0" cy="0"/>
+        </a:xfrm>
+      </p:grpSpPr>
+      <p:sp>
+        <p:nvSpPr>
+          <p:cNvPr id="2" name="Title 1"/>
+          <p:cNvSpPr>
+            <a:spLocks noGrp="1"/>
+          </p:cNvSpPr>
+          <p:nvPr>
+            <p:ph type="title"/>
+          </p:nvPr>
+        </p:nvSpPr>
+        <p:spPr>
+          <a:xfrm>
+            <a:off x="0" y="0"/>
+            <a:ext cx="9144000" cy="582780"/>
+          </a:xfrm>
+        </p:spPr>
+        <p:txBody>
+          <a:bodyPr/>
+          <a:lstStyle/>
+          <a:p>
+            <a:pPr lvl="0" indent="0" marL="0">
+              <a:buNone/>
+            </a:pPr>
+            <a:r>
+              <a:rPr/>
+              <a:t>Getting unstuck</a:t>
+            </a:r>
+          </a:p>
+        </p:txBody>
+      </p:sp>
+      <p:sp>
+        <p:nvSpPr>
+          <p:cNvPr id="3" name="Content Placeholder 2"/>
+          <p:cNvSpPr>
+            <a:spLocks noGrp="1"/>
+          </p:cNvSpPr>
+          <p:nvPr>
+            <p:ph idx="1"/>
+          </p:nvPr>
+        </p:nvSpPr>
+        <p:spPr/>
+        <p:txBody>
+          <a:bodyPr/>
+          <a:lstStyle/>
+          <a:p>
+            <a:pPr lvl="0" indent="-342900" marL="342900">
+              <a:buAutoNum type="arabicPeriod"/>
+            </a:pPr>
+            <a:r>
+              <a:rPr b="1">
+                <a:latin typeface="Courier"/>
+              </a:rPr>
+              <a:t>by</a:t>
+            </a:r>
+            <a:r>
+              <a:rPr b="1"/>
+              <a:t> must be supplied / weird match</a:t>
+            </a:r>
+            <a:r>
+              <a:rPr/>
+              <a:t> → the key columns are named differently; use </a:t>
+            </a:r>
+            <a:r>
+              <a:rPr>
+                <a:latin typeface="Courier"/>
+              </a:rPr>
+              <a:t>by = c("animal_id" = "fisher_id")</a:t>
+            </a:r>
+            <a:r>
+              <a:rPr/>
+              <a:t>.</a:t>
+            </a:r>
+          </a:p>
+          <a:p>
+            <a:pPr lvl="0" indent="-342900" marL="342900">
+              <a:buAutoNum type="arabicPeriod"/>
+            </a:pPr>
+            <a:r>
+              <a:rPr b="1"/>
+              <a:t>Zero matches</a:t>
+            </a:r>
+            <a:r>
+              <a:rPr/>
+              <a:t> → check the key </a:t>
+            </a:r>
+            <a:r>
+              <a:rPr b="1"/>
+              <a:t>case</a:t>
+            </a:r>
+            <a:r>
+              <a:rPr/>
+              <a:t> (</a:t>
+            </a:r>
+            <a:r>
+              <a:rPr>
+                <a:latin typeface="Courier"/>
+              </a:rPr>
+              <a:t>str_to_upper()</a:t>
+            </a:r>
+            <a:r>
+              <a:rPr/>
+              <a:t> on </a:t>
+            </a:r>
+            <a:r>
+              <a:rPr>
+                <a:latin typeface="Courier"/>
+              </a:rPr>
+              <a:t>animal_id</a:t>
+            </a:r>
+            <a:r>
+              <a:rPr/>
+              <a:t>) — </a:t>
+            </a:r>
+            <a:r>
+              <a:rPr>
+                <a:latin typeface="Courier"/>
+              </a:rPr>
+              <a:t>"f07"</a:t>
+            </a:r>
+            <a:r>
+              <a:rPr/>
+              <a:t> won’t match </a:t>
+            </a:r>
+            <a:r>
+              <a:rPr>
+                <a:latin typeface="Courier"/>
+              </a:rPr>
+              <a:t>"F07"</a:t>
+            </a:r>
+            <a:r>
+              <a:rPr/>
+              <a:t>.</a:t>
+            </a:r>
+          </a:p>
+          <a:p>
+            <a:pPr lvl="0" indent="-342900" marL="342900">
+              <a:buAutoNum type="arabicPeriod"/>
+            </a:pPr>
+            <a:r>
+              <a:rPr b="1"/>
+              <a:t>Way too many rows after a join</a:t>
+            </a:r>
+            <a:r>
+              <a:rPr/>
+              <a:t> → you joined on </a:t>
+            </a:r>
+            <a:r>
+              <a:rPr>
+                <a:latin typeface="Courier"/>
+              </a:rPr>
+              <a:t>site</a:t>
+            </a:r>
+            <a:r>
+              <a:rPr/>
+              <a:t> by accident; a shared key that isn’t unique fans the rows out. Always name the real key.</a:t>
+            </a:r>
+          </a:p>
+          <a:p>
+            <a:pPr lvl="0" indent="-342900" marL="342900">
+              <a:buAutoNum type="arabicPeriod"/>
+            </a:pPr>
+            <a:r>
+              <a:rPr b="1"/>
+              <a:t>dplyr announced </a:t>
+            </a:r>
+            <a:r>
+              <a:rPr b="1">
+                <a:latin typeface="Courier"/>
+              </a:rPr>
+              <a:t>by = join_by(site)</a:t>
+            </a:r>
+            <a:r>
+              <a:rPr/>
+              <a:t> → you forgot to name your key; both tables share a </a:t>
+            </a:r>
+            <a:r>
+              <a:rPr>
+                <a:latin typeface="Courier"/>
+              </a:rPr>
+              <a:t>site</a:t>
+            </a:r>
+            <a:r>
+              <a:rPr/>
+              <a:t> column that means different things.</a:t>
+            </a:r>
+          </a:p>
+          <a:p>
+            <a:pPr lvl="0" indent="-342900" marL="342900">
+              <a:buAutoNum type="arabicPeriod"/>
+            </a:pPr>
+            <a:r>
+              <a:rPr b="1"/>
+              <a:t>Cheat sheet</a:t>
+            </a:r>
+            <a:r>
+              <a:rPr/>
+              <a:t> — </a:t>
+            </a:r>
+            <a:r>
+              <a:rPr>
+                <a:hlinkClick r:id="rId2"/>
+              </a:rPr>
+              <a:t>https://dplyr.tidyverse.org/reference/mutate-joins.html</a:t>
+            </a:r>
+          </a:p>
+          <a:p>
+            <a:pPr lvl="0" indent="0" marL="1270000">
+              <a:buNone/>
+            </a:pPr>
+            <a:r>
+              <a:rPr sz="2000"/>
+              <a:t>💡 </a:t>
+            </a:r>
+            <a:r>
+              <a:rPr sz="2000" b="1"/>
+              <a:t>Key idea:</a:t>
+            </a:r>
+            <a:r>
+              <a:rPr sz="2000"/>
+              <a:t> </a:t>
+            </a:r>
+            <a:r>
+              <a:rPr sz="2000">
+                <a:latin typeface="Courier"/>
+              </a:rPr>
+              <a:t>fisher_individuals.csv</a:t>
+            </a:r>
+            <a:r>
+              <a:rPr sz="2000"/>
+              <a:t> and </a:t>
+            </a:r>
+            <a:r>
+              <a:rPr sz="2000">
+                <a:latin typeface="Courier"/>
+              </a:rPr>
+              <a:t>fisher_captures.csv</a:t>
+            </a:r>
+            <a:r>
+              <a:rPr sz="2000"/>
+              <a:t> were each incomplete on their own — one had no field history, the other had no animal attributes. </a:t>
+            </a:r>
+            <a:r>
+              <a:rPr sz="2000">
+                <a:latin typeface="Courier"/>
+              </a:rPr>
+              <a:t>fisher_joined.csv</a:t>
+            </a:r>
+            <a:r>
+              <a:rPr sz="2000"/>
+              <a:t> is what you get once a shared key ties them together.</a:t>
+            </a:r>
+          </a:p>
+        </p:txBody>
+      </p:sp>
+    </p:spTree>
+  </p:cSld>
+</p:sld>
+</file>
+
+<file path=ppt/slides/slide23.xml><?xml version="1.0" encoding="utf-8"?>
 <p:sld xmlns:a="http://schemas.openxmlformats.org/drawingml/2006/main" xmlns:r="http://schemas.openxmlformats.org/officeDocument/2006/relationships" xmlns:p="http://schemas.openxmlformats.org/presentationml/2006/main">
   <p:cSld>
     <p:spTree>
@@ -7110,7 +8164,7 @@
             </a:pPr>
             <a:r>
               <a:rPr i="1"/>
-              <a:t>End of Worksheet 12. Next: Worksheet 13 — mapping the sightings you just assembled.</a:t>
+              <a:t>End of the Joins worksheet.</a:t>
             </a:r>
           </a:p>
         </p:txBody>
@@ -7284,7 +8338,7 @@
                 </a:solidFill>
                 <a:latin typeface="Courier"/>
               </a:rPr>
-              <a:t>reports_df   &lt;- </a:t>
+              <a:t>individuals_df &lt;- </a:t>
             </a:r>
             <a:r>
               <a:rPr>
@@ -7311,7 +8365,7 @@
                 </a:solidFill>
                 <a:latin typeface="Courier"/>
               </a:rPr>
-              <a:t>"data/bfro_reports.csv"</a:t>
+              <a:t>"data/fisher_individuals.csv"</a:t>
             </a:r>
             <a:r>
               <a:rPr>
@@ -7330,7 +8384,7 @@
                 </a:solidFill>
                 <a:latin typeface="Courier"/>
               </a:rPr>
-              <a:t>locations_df &lt;- </a:t>
+              <a:t>captures_df    &lt;- </a:t>
             </a:r>
             <a:r>
               <a:rPr>
@@ -7357,7 +8411,7 @@
                 </a:solidFill>
                 <a:latin typeface="Courier"/>
               </a:rPr>
-              <a:t>"data/bfro_locations.csv"</a:t>
+              <a:t>"data/fisher_captures.csv"</a:t>
             </a:r>
             <a:r>
               <a:rPr>
@@ -7386,7 +8440,7 @@
                 </a:solidFill>
                 <a:latin typeface="Courier"/>
               </a:rPr>
-              <a:t>(reports_df)</a:t>
+              <a:t>(individuals_df)</a:t>
             </a:r>
             <a:br/>
             <a:r>
@@ -7405,7 +8459,7 @@
                 </a:solidFill>
                 <a:latin typeface="Courier"/>
               </a:rPr>
-              <a:t>(locations_df)</a:t>
+              <a:t>(captures_df)</a:t>
             </a:r>
           </a:p>
           <a:p>
@@ -7429,8 +8483,8 @@
               <a:rPr>
                 <a:latin typeface="Courier"/>
               </a:rPr>
-              <a:t>reports_df:   rows =        cols =
-locations_df: rows =        cols =
+              <a:t>individuals_df: rows =        cols =
+captures_df:    rows =        cols =
 Which table has more rows? Why might that be?</a:t>
             </a:r>
           </a:p>
@@ -7522,7 +8576,7 @@
                 </a:solidFill>
                 <a:latin typeface="Courier"/>
               </a:rPr>
-              <a:t>reports_df   </a:t>
+              <a:t>individuals_df </a:t>
             </a:r>
             <a:r>
               <a:rPr>
@@ -7558,7 +8612,7 @@
                 </a:solidFill>
                 <a:latin typeface="Courier"/>
               </a:rPr>
-              <a:t>(REPORT_NUMBER, YEAR, STATE, REPORT_CLASS) </a:t>
+              <a:t>(fisher_id, sex, site, release_date) </a:t>
             </a:r>
             <a:r>
               <a:rPr>
@@ -7622,7 +8676,7 @@
                 </a:solidFill>
                 <a:latin typeface="Courier"/>
               </a:rPr>
-              <a:t>locations_df </a:t>
+              <a:t>captures_df    </a:t>
             </a:r>
             <a:r>
               <a:rPr>
@@ -7658,7 +8712,7 @@
                 </a:solidFill>
                 <a:latin typeface="Courier"/>
               </a:rPr>
-              <a:t>(number, latitude, longitude) </a:t>
+              <a:t>(animal_id, capture_date, site, mass_kg) </a:t>
             </a:r>
             <a:r>
               <a:rPr>
@@ -7740,9 +8794,10 @@
               <a:rPr>
                 <a:latin typeface="Courier"/>
               </a:rPr>
-              <a:t>Key in reports_df:
-Key in locations_df:
-Are the names the same?  Y / N</a:t>
+              <a:t>Key in individuals_df:
+Key in captures_df:
+Are the names the same?  Y / N
+Both tables ALSO have a `site` column — do those mean the same thing? (look again)</a:t>
             </a:r>
           </a:p>
         </p:txBody>
@@ -7833,7 +8888,7 @@
                 </a:solidFill>
                 <a:latin typeface="Courier"/>
               </a:rPr>
-              <a:t># One row per report + match the key type ----------------</a:t>
+              <a:t># The capture key is lowercase ("f07"); the individual key is "F07" ----</a:t>
             </a:r>
             <a:br/>
             <a:r>
@@ -7843,7 +8898,7 @@
                 </a:solidFill>
                 <a:latin typeface="Courier"/>
               </a:rPr>
-              <a:t>reports_df &lt;- reports_df </a:t>
+              <a:t>captures_df </a:t>
             </a:r>
             <a:r>
               <a:rPr>
@@ -7854,15 +8909,14 @@
               </a:rPr>
               <a:t>%&gt;%</a:t>
             </a:r>
-            <a:br/>
-            <a:r>
-              <a:rPr>
-                <a:solidFill>
-                  <a:srgbClr val="003B4F"/>
-                </a:solidFill>
-                <a:latin typeface="Courier"/>
-              </a:rPr>
-              <a:t>  </a:t>
+            <a:r>
+              <a:rPr>
+                <a:solidFill>
+                  <a:srgbClr val="003B4F"/>
+                </a:solidFill>
+                <a:latin typeface="Courier"/>
+              </a:rPr>
+              <a:t> </a:t>
             </a:r>
             <a:r>
               <a:rPr>
@@ -7871,25 +8925,25 @@
                 </a:solidFill>
                 <a:latin typeface="Courier"/>
               </a:rPr>
-              <a:t>distinct</a:t>
-            </a:r>
-            <a:r>
-              <a:rPr>
-                <a:solidFill>
-                  <a:srgbClr val="003B4F"/>
-                </a:solidFill>
-                <a:latin typeface="Courier"/>
-              </a:rPr>
-              <a:t>(REPORT_NUMBER, </a:t>
-            </a:r>
-            <a:r>
-              <a:rPr>
-                <a:solidFill>
-                  <a:srgbClr val="657422"/>
-                </a:solidFill>
-                <a:latin typeface="Courier"/>
-              </a:rPr>
-              <a:t>.keep_all =</a:t>
+              <a:t>count</a:t>
+            </a:r>
+            <a:r>
+              <a:rPr>
+                <a:solidFill>
+                  <a:srgbClr val="003B4F"/>
+                </a:solidFill>
+                <a:latin typeface="Courier"/>
+              </a:rPr>
+              <a:t>(animal_id) </a:t>
+            </a:r>
+            <a:r>
+              <a:rPr>
+                <a:solidFill>
+                  <a:srgbClr val="5E5E5E"/>
+                </a:solidFill>
+                <a:latin typeface="Courier"/>
+              </a:rPr>
+              <a:t>%&gt;%</a:t>
             </a:r>
             <a:r>
               <a:rPr>
@@ -7903,103 +8957,114 @@
             <a:r>
               <a:rPr>
                 <a:solidFill>
-                  <a:srgbClr val="8F5902"/>
-                </a:solidFill>
-                <a:latin typeface="Courier"/>
-              </a:rPr>
-              <a:t>TRUE</a:t>
-            </a:r>
-            <a:r>
-              <a:rPr>
-                <a:solidFill>
-                  <a:srgbClr val="003B4F"/>
-                </a:solidFill>
-                <a:latin typeface="Courier"/>
-              </a:rPr>
-              <a:t>) </a:t>
-            </a:r>
-            <a:r>
-              <a:rPr>
-                <a:solidFill>
-                  <a:srgbClr val="5E5E5E"/>
-                </a:solidFill>
-                <a:latin typeface="Courier"/>
-              </a:rPr>
-              <a:t>%&gt;%</a:t>
-            </a:r>
-            <a:br/>
-            <a:r>
-              <a:rPr>
-                <a:solidFill>
-                  <a:srgbClr val="003B4F"/>
-                </a:solidFill>
-                <a:latin typeface="Courier"/>
-              </a:rPr>
-              <a:t>  </a:t>
-            </a:r>
-            <a:r>
-              <a:rPr>
-                <a:solidFill>
                   <a:srgbClr val="4758AB"/>
                 </a:solidFill>
                 <a:latin typeface="Courier"/>
               </a:rPr>
-              <a:t>mutate</a:t>
-            </a:r>
-            <a:r>
-              <a:rPr>
-                <a:solidFill>
-                  <a:srgbClr val="003B4F"/>
-                </a:solidFill>
-                <a:latin typeface="Courier"/>
-              </a:rPr>
-              <a:t>(</a:t>
-            </a:r>
-            <a:r>
-              <a:rPr>
-                <a:solidFill>
-                  <a:srgbClr val="657422"/>
-                </a:solidFill>
-                <a:latin typeface="Courier"/>
-              </a:rPr>
-              <a:t>REPORT_NUMBER =</a:t>
-            </a:r>
-            <a:r>
-              <a:rPr>
-                <a:solidFill>
-                  <a:srgbClr val="003B4F"/>
-                </a:solidFill>
-                <a:latin typeface="Courier"/>
-              </a:rPr>
-              <a:t> </a:t>
-            </a:r>
-            <a:r>
-              <a:rPr>
-                <a:solidFill>
-                  <a:srgbClr val="4758AB"/>
-                </a:solidFill>
-                <a:latin typeface="Courier"/>
-              </a:rPr>
-              <a:t>as.integer</a:t>
-            </a:r>
-            <a:r>
-              <a:rPr>
-                <a:solidFill>
-                  <a:srgbClr val="003B4F"/>
-                </a:solidFill>
-                <a:latin typeface="Courier"/>
-              </a:rPr>
-              <a:t>(REPORT_NUMBER))</a:t>
+              <a:t>head</a:t>
+            </a:r>
+            <a:r>
+              <a:rPr>
+                <a:solidFill>
+                  <a:srgbClr val="003B4F"/>
+                </a:solidFill>
+                <a:latin typeface="Courier"/>
+              </a:rPr>
+              <a:t>()</a:t>
             </a:r>
             <a:br/>
             <a:br/>
             <a:r>
               <a:rPr>
                 <a:solidFill>
+                  <a:srgbClr val="003B4F"/>
+                </a:solidFill>
+                <a:latin typeface="Courier"/>
+              </a:rPr>
+              <a:t>captures_df &lt;- captures_df </a:t>
+            </a:r>
+            <a:r>
+              <a:rPr>
+                <a:solidFill>
+                  <a:srgbClr val="5E5E5E"/>
+                </a:solidFill>
+                <a:latin typeface="Courier"/>
+              </a:rPr>
+              <a:t>%&gt;%</a:t>
+            </a:r>
+            <a:br/>
+            <a:r>
+              <a:rPr>
+                <a:solidFill>
+                  <a:srgbClr val="003B4F"/>
+                </a:solidFill>
+                <a:latin typeface="Courier"/>
+              </a:rPr>
+              <a:t>  </a:t>
+            </a:r>
+            <a:r>
+              <a:rPr>
+                <a:solidFill>
                   <a:srgbClr val="4758AB"/>
                 </a:solidFill>
                 <a:latin typeface="Courier"/>
               </a:rPr>
+              <a:t>mutate</a:t>
+            </a:r>
+            <a:r>
+              <a:rPr>
+                <a:solidFill>
+                  <a:srgbClr val="003B4F"/>
+                </a:solidFill>
+                <a:latin typeface="Courier"/>
+              </a:rPr>
+              <a:t>(</a:t>
+            </a:r>
+            <a:r>
+              <a:rPr>
+                <a:solidFill>
+                  <a:srgbClr val="657422"/>
+                </a:solidFill>
+                <a:latin typeface="Courier"/>
+              </a:rPr>
+              <a:t>animal_id =</a:t>
+            </a:r>
+            <a:r>
+              <a:rPr>
+                <a:solidFill>
+                  <a:srgbClr val="003B4F"/>
+                </a:solidFill>
+                <a:latin typeface="Courier"/>
+              </a:rPr>
+              <a:t> </a:t>
+            </a:r>
+            <a:r>
+              <a:rPr>
+                <a:solidFill>
+                  <a:srgbClr val="4758AB"/>
+                </a:solidFill>
+                <a:latin typeface="Courier"/>
+              </a:rPr>
+              <a:t>str_to_upper</a:t>
+            </a:r>
+            <a:r>
+              <a:rPr>
+                <a:solidFill>
+                  <a:srgbClr val="003B4F"/>
+                </a:solidFill>
+                <a:latin typeface="Courier"/>
+              </a:rPr>
+              <a:t>(animal_id))</a:t>
+            </a:r>
+            <a:br/>
+            <a:br/>
+            <a:r>
+              <a:rPr>
+                <a:solidFill>
+                  <a:srgbClr val="4758AB"/>
+                </a:solidFill>
+                <a:latin typeface="Courier"/>
+              </a:rPr>
               <a:t>n_distinct</a:t>
             </a:r>
             <a:r>
@@ -8009,7 +9074,7 @@
                 </a:solidFill>
                 <a:latin typeface="Courier"/>
               </a:rPr>
-              <a:t>(reports_df</a:t>
+              <a:t>(individuals_df</a:t>
             </a:r>
             <a:r>
               <a:rPr>
@@ -8027,7 +9092,7 @@
                 </a:solidFill>
                 <a:latin typeface="Courier"/>
               </a:rPr>
-              <a:t>REPORT_NUMBER)</a:t>
+              <a:t>fisher_id)</a:t>
             </a:r>
             <a:br/>
             <a:r>
@@ -8046,7 +9111,7 @@
                 </a:solidFill>
                 <a:latin typeface="Courier"/>
               </a:rPr>
-              <a:t>(locations_df</a:t>
+              <a:t>(captures_df</a:t>
             </a:r>
             <a:r>
               <a:rPr>
@@ -8064,7 +9129,7 @@
                 </a:solidFill>
                 <a:latin typeface="Courier"/>
               </a:rPr>
-              <a:t>number)</a:t>
+              <a:t>animal_id)</a:t>
             </a:r>
           </a:p>
           <a:p>
@@ -8087,17 +9152,17 @@
               <a:rPr>
                 <a:latin typeface="Courier"/>
               </a:rPr>
-              <a:t>REPORT_NUMBER</a:t>
-            </a:r>
-            <a:r>
-              <a:rPr/>
-              <a:t> was stored like </a:t>
-            </a:r>
-            <a:r>
-              <a:rPr>
-                <a:latin typeface="Courier"/>
-              </a:rPr>
-              <a:t>30680.0</a:t>
+              <a:t>animal_id</a:t>
+            </a:r>
+            <a:r>
+              <a:rPr/>
+              <a:t> was stored as </a:t>
+            </a:r>
+            <a:r>
+              <a:rPr>
+                <a:latin typeface="Courier"/>
+              </a:rPr>
+              <a:t>f07</a:t>
             </a:r>
             <a:r>
               <a:rPr/>
@@ -8107,7 +9172,7 @@
               <a:rPr>
                 <a:latin typeface="Courier"/>
               </a:rPr>
-              <a:t>number</a:t>
+              <a:t>fisher_id</a:t>
             </a:r>
             <a:r>
               <a:rPr/>
@@ -8117,11 +9182,21 @@
               <a:rPr>
                 <a:latin typeface="Courier"/>
               </a:rPr>
-              <a:t>30680</a:t>
-            </a:r>
-            <a:r>
-              <a:rPr/>
-              <a:t>. Why must we fix that before joining?</a:t>
+              <a:t>F07</a:t>
+            </a:r>
+            <a:r>
+              <a:rPr/>
+              <a:t>. Why must we fix the case before joining? What is the </a:t>
+            </a:r>
+            <a:r>
+              <a:rPr>
+                <a:latin typeface="Courier"/>
+              </a:rPr>
+              <a:t>UNK</a:t>
+            </a:r>
+            <a:r>
+              <a:rPr/>
+              <a:t> value, and why is it not a real fisher?</a:t>
             </a:r>
           </a:p>
           <a:p>
@@ -8280,17 +9355,25 @@
             </a:r>
             <a:r>
               <a:rPr sz="2000"/>
-              <a:t> After a </a:t>
+              <a:t> You will keep </a:t>
+            </a:r>
+            <a:r>
+              <a:rPr sz="2000" b="1"/>
+              <a:t>every capture event</a:t>
+            </a:r>
+            <a:r>
+              <a:rPr sz="2000"/>
+              <a:t> and attach who the animal is. How many rows will the result have, and roughly how many will have a missing </a:t>
             </a:r>
             <a:r>
               <a:rPr sz="2000">
                 <a:latin typeface="Courier"/>
               </a:rPr>
-              <a:t>left_join</a:t>
+              <a:t>sex</a:t>
             </a:r>
             <a:r>
               <a:rPr sz="2000"/>
-              <a:t>, how many rows will you have (all reports? only matched?), and roughly how many will have a latitude?</a:t>
+              <a:t> (because the animal was unmarked)?</a:t>
             </a:r>
           </a:p>
           <a:p>
@@ -8313,7 +9396,7 @@
                 </a:solidFill>
                 <a:latin typeface="Courier"/>
               </a:rPr>
-              <a:t>bigfoot_df &lt;- reports_df </a:t>
+              <a:t>captures_joined &lt;- captures_df </a:t>
             </a:r>
             <a:r>
               <a:rPr>
@@ -8350,7 +9433,7 @@
                 </a:solidFill>
                 <a:latin typeface="Courier"/>
               </a:rPr>
-              <a:t>(locations_df, </a:t>
+              <a:t>(individuals_df, </a:t>
             </a:r>
             <a:r>
               <a:rPr>
@@ -8395,7 +9478,7 @@
                 </a:solidFill>
                 <a:latin typeface="Courier"/>
               </a:rPr>
-              <a:t>"REPORT_NUMBER"</a:t>
+              <a:t>"animal_id"</a:t>
             </a:r>
             <a:r>
               <a:rPr>
@@ -8413,7 +9496,7 @@
                 </a:solidFill>
                 <a:latin typeface="Courier"/>
               </a:rPr>
-              <a:t>"number"</a:t>
+              <a:t>"fisher_id"</a:t>
             </a:r>
             <a:r>
               <a:rPr>
@@ -8442,7 +9525,7 @@
                 </a:solidFill>
                 <a:latin typeface="Courier"/>
               </a:rPr>
-              <a:t>(bigfoot_df)                 </a:t>
+              <a:t>(captures_joined)                </a:t>
             </a:r>
             <a:r>
               <a:rPr>
@@ -8475,29 +9558,38 @@
             <a:r>
               <a:rPr>
                 <a:solidFill>
+                  <a:srgbClr val="4758AB"/>
+                </a:solidFill>
+                <a:latin typeface="Courier"/>
+              </a:rPr>
+              <a:t>is.na</a:t>
+            </a:r>
+            <a:r>
+              <a:rPr>
+                <a:solidFill>
+                  <a:srgbClr val="003B4F"/>
+                </a:solidFill>
+                <a:latin typeface="Courier"/>
+              </a:rPr>
+              <a:t>(captures_joined</a:t>
+            </a:r>
+            <a:r>
+              <a:rPr>
+                <a:solidFill>
                   <a:srgbClr val="5E5E5E"/>
                 </a:solidFill>
                 <a:latin typeface="Courier"/>
               </a:rPr>
-              <a:t>!</a:t>
-            </a:r>
-            <a:r>
-              <a:rPr>
-                <a:solidFill>
-                  <a:srgbClr val="4758AB"/>
-                </a:solidFill>
-                <a:latin typeface="Courier"/>
-              </a:rPr>
-              <a:t>is.na</a:t>
-            </a:r>
-            <a:r>
-              <a:rPr>
-                <a:solidFill>
-                  <a:srgbClr val="003B4F"/>
-                </a:solidFill>
-                <a:latin typeface="Courier"/>
-              </a:rPr>
-              <a:t>(bigfoot_df</a:t>
+              <a:t>$</a:t>
+            </a:r>
+            <a:r>
+              <a:rPr>
+                <a:solidFill>
+                  <a:srgbClr val="003B4F"/>
+                </a:solidFill>
+                <a:latin typeface="Courier"/>
+              </a:rPr>
+              <a:t>sex))      </a:t>
             </a:r>
             <a:r>
               <a:rPr>
@@ -8506,25 +9598,7 @@
                 </a:solidFill>
                 <a:latin typeface="Courier"/>
               </a:rPr>
-              <a:t>$</a:t>
-            </a:r>
-            <a:r>
-              <a:rPr>
-                <a:solidFill>
-                  <a:srgbClr val="003B4F"/>
-                </a:solidFill>
-                <a:latin typeface="Courier"/>
-              </a:rPr>
-              <a:t>latitude)) </a:t>
-            </a:r>
-            <a:r>
-              <a:rPr>
-                <a:solidFill>
-                  <a:srgbClr val="5E5E5E"/>
-                </a:solidFill>
-                <a:latin typeface="Courier"/>
-              </a:rPr>
-              <a:t># rows with coordinates</a:t>
+              <a:t># capture events we can't attribute</a:t>
             </a:r>
           </a:p>
           <a:p>
@@ -8549,8 +9623,47 @@
                 <a:latin typeface="Courier"/>
               </a:rPr>
               <a:t>Total rows after left_join:
-Rows WITH coordinates:
-Rows with NA coordinates:</a:t>
+Rows WITH an identified individual:
+Rows with NA individual info:</a:t>
+            </a:r>
+          </a:p>
+          <a:p>
+            <a:pPr lvl="0" indent="0" marL="1270000">
+              <a:buNone/>
+            </a:pPr>
+            <a:r>
+              <a:rPr sz="2000"/>
+              <a:t>Note the join gives you two </a:t>
+            </a:r>
+            <a:r>
+              <a:rPr sz="2000">
+                <a:latin typeface="Courier"/>
+              </a:rPr>
+              <a:t>site</a:t>
+            </a:r>
+            <a:r>
+              <a:rPr sz="2000"/>
+              <a:t> columns — </a:t>
+            </a:r>
+            <a:r>
+              <a:rPr sz="2000">
+                <a:latin typeface="Courier"/>
+              </a:rPr>
+              <a:t>site.x</a:t>
+            </a:r>
+            <a:r>
+              <a:rPr sz="2000"/>
+              <a:t> (capture site) and </a:t>
+            </a:r>
+            <a:r>
+              <a:rPr sz="2000">
+                <a:latin typeface="Courier"/>
+              </a:rPr>
+              <a:t>site.y</a:t>
+            </a:r>
+            <a:r>
+              <a:rPr sz="2000"/>
+              <a:t> (release site). Real fishers move; those are genuinely different.</a:t>
             </a:r>
           </a:p>
         </p:txBody>
@@ -8651,7 +9764,7 @@
                 </a:solidFill>
                 <a:latin typeface="Courier"/>
               </a:rPr>
-              <a:t>reports_df </a:t>
+              <a:t>captures_df </a:t>
             </a:r>
             <a:r>
               <a:rPr>
@@ -8687,7 +9800,7 @@
                 </a:solidFill>
                 <a:latin typeface="Courier"/>
               </a:rPr>
-              <a:t>(locations_df)</a:t>
+              <a:t>(individuals_df)</a:t>
             </a:r>
           </a:p>
           <a:p>
@@ -8710,11 +9823,27 @@
               <a:rPr>
                 <a:latin typeface="Courier"/>
               </a:rPr>
-              <a:t>index</a:t>
-            </a:r>
-            <a:r>
-              <a:rPr/>
-              <a:t> completely wrong here?</a:t>
+              <a:t>site</a:t>
+            </a:r>
+            <a:r>
+              <a:rPr/>
+              <a:t> completely wrong here? (What does it match — a capture event to the </a:t>
+            </a:r>
+            <a:r>
+              <a:rPr i="1"/>
+              <a:t>right animal</a:t>
+            </a:r>
+            <a:r>
+              <a:rPr/>
+              <a:t>, or to </a:t>
+            </a:r>
+            <a:r>
+              <a:rPr i="1"/>
+              <a:t>every animal released at that site</a:t>
+            </a:r>
+            <a:r>
+              <a:rPr/>
+              <a:t>?)</a:t>
             </a:r>
           </a:p>
           <a:p>
@@ -8726,7 +9855,8 @@
                 <a:latin typeface="Courier"/>
               </a:rPr>
               <a:t>dplyr joined on:
-Why that's wrong:</a:t>
+Why that's wrong:
+Row count of this accidental join vs. Part 4's correct join:</a:t>
             </a:r>
           </a:p>
           <a:p>
@@ -8753,7 +9883,7 @@
               <a:rPr sz="2000" i="1">
                 <a:latin typeface="Courier"/>
               </a:rPr>
-              <a:t>by = ...</a:t>
+              <a:t>by = join_by(site)</a:t>
             </a:r>
             <a:r>
               <a:rPr sz="2000" i="1"/>
